--- a/public/fun/pack/pptx/birthday/돌잔치_10_첫번째이야기중심_어버이날꽃.pptx
+++ b/public/fun/pack/pptx/birthday/돌잔치_10_첫번째이야기중심_어버이날꽃.pptx
@@ -3347,7 +3347,7 @@
             <a:r>
               <a:rPr sz="4000" b="1" i="0">
                 <a:solidFill>
-                  <a:srgbClr val="7A1F2E"/>
+                  <a:srgbClr val="721D2B"/>
                 </a:solidFill>
               </a:rPr>
               <a:t>첫 번째 생일</a:t>
@@ -3385,7 +3385,7 @@
             <a:r>
               <a:rPr sz="1700" b="0" i="1">
                 <a:solidFill>
-                  <a:srgbClr val="7A1F2E"/>
+                  <a:srgbClr val="721D2B"/>
                 </a:solidFill>
               </a:rPr>
               <a:t>임신 소식을 들은 날부터 기록했습니다</a:t>
@@ -3460,7 +3460,7 @@
     <p:bg>
       <p:bgPr>
         <a:solidFill>
-          <a:srgbClr val="FBEFF1"/>
+          <a:srgbClr val="FCF3F4"/>
         </a:solidFill>
         <a:effectLst/>
       </p:bgPr>
@@ -3489,7 +3489,7 @@
           <a:noFill/>
           <a:ln w="28575">
             <a:solidFill>
-              <a:srgbClr val="CC334D"/>
+              <a:srgbClr val="DF3A55"/>
             </a:solidFill>
           </a:ln>
         </p:spPr>
@@ -3518,7 +3518,7 @@
           <a:noFill/>
           <a:ln w="9525">
             <a:solidFill>
-              <a:srgbClr val="F4CDD3"/>
+              <a:srgbClr val="F7D4DA"/>
             </a:solidFill>
           </a:ln>
         </p:spPr>
@@ -3560,7 +3560,7 @@
             <a:r>
               <a:rPr sz="3000" b="1" i="0">
                 <a:solidFill>
-                  <a:srgbClr val="7A1F2E"/>
+                  <a:srgbClr val="721D2B"/>
                 </a:solidFill>
               </a:rPr>
               <a:t>우리 아기를 소개합니다</a:t>
@@ -3585,11 +3585,11 @@
             </a:avLst>
           </a:prstGeom>
           <a:solidFill>
-            <a:srgbClr val="F4CDD3"/>
+            <a:srgbClr val="F7D4DA"/>
           </a:solidFill>
           <a:ln w="19050">
             <a:solidFill>
-              <a:srgbClr val="CC334D"/>
+              <a:srgbClr val="DF3A55"/>
             </a:solidFill>
             <a:prstDash val="dash"/>
           </a:ln>
@@ -3608,7 +3608,7 @@
             <a:r>
               <a:rPr sz="1400" b="0" i="0">
                 <a:solidFill>
-                  <a:srgbClr val="7A1F2E"/>
+                  <a:srgbClr val="721D2B"/>
                 </a:solidFill>
               </a:rPr>
               <a:t>아기 사진을 넣어 주세요</a:t>
@@ -3648,7 +3648,7 @@
                       <a:r>
                         <a:rPr sz="1500" b="1">
                           <a:solidFill>
-                            <a:srgbClr val="7A1F2E"/>
+                            <a:srgbClr val="721D2B"/>
                           </a:solidFill>
                         </a:rPr>
                         <a:t>이름</a:t>
@@ -3658,30 +3658,30 @@
                   <a:tcPr anchor="ctr" marL="73152" marR="73152">
                     <a:lnL w="9525" cap="flat" cmpd="sng" algn="ctr">
                       <a:solidFill>
-                        <a:srgbClr val="F4CDD3"/>
+                        <a:srgbClr val="F7D4DA"/>
                       </a:solidFill>
                       <a:prstDash val="solid"/>
                     </a:lnL>
                     <a:lnR w="9525" cap="flat" cmpd="sng" algn="ctr">
                       <a:solidFill>
-                        <a:srgbClr val="F4CDD3"/>
+                        <a:srgbClr val="F7D4DA"/>
                       </a:solidFill>
                       <a:prstDash val="solid"/>
                     </a:lnR>
                     <a:lnT w="9525" cap="flat" cmpd="sng" algn="ctr">
                       <a:solidFill>
-                        <a:srgbClr val="F4CDD3"/>
+                        <a:srgbClr val="F7D4DA"/>
                       </a:solidFill>
                       <a:prstDash val="solid"/>
                     </a:lnT>
                     <a:lnB w="9525" cap="flat" cmpd="sng" algn="ctr">
                       <a:solidFill>
-                        <a:srgbClr val="F4CDD3"/>
+                        <a:srgbClr val="F7D4DA"/>
                       </a:solidFill>
                       <a:prstDash val="solid"/>
                     </a:lnB>
                     <a:solidFill>
-                      <a:srgbClr val="F4CDD3"/>
+                      <a:srgbClr val="F7D4DA"/>
                     </a:solidFill>
                   </a:tcPr>
                 </a:tc>
@@ -3704,30 +3704,30 @@
                   <a:tcPr anchor="ctr" marL="73152" marR="73152">
                     <a:lnL w="9525" cap="flat" cmpd="sng" algn="ctr">
                       <a:solidFill>
-                        <a:srgbClr val="F4CDD3"/>
+                        <a:srgbClr val="F7D4DA"/>
                       </a:solidFill>
                       <a:prstDash val="solid"/>
                     </a:lnL>
                     <a:lnR w="9525" cap="flat" cmpd="sng" algn="ctr">
                       <a:solidFill>
-                        <a:srgbClr val="F4CDD3"/>
+                        <a:srgbClr val="F7D4DA"/>
                       </a:solidFill>
                       <a:prstDash val="solid"/>
                     </a:lnR>
                     <a:lnT w="9525" cap="flat" cmpd="sng" algn="ctr">
                       <a:solidFill>
-                        <a:srgbClr val="F4CDD3"/>
+                        <a:srgbClr val="F7D4DA"/>
                       </a:solidFill>
                       <a:prstDash val="solid"/>
                     </a:lnT>
                     <a:lnB w="9525" cap="flat" cmpd="sng" algn="ctr">
                       <a:solidFill>
-                        <a:srgbClr val="F4CDD3"/>
+                        <a:srgbClr val="F7D4DA"/>
                       </a:solidFill>
                       <a:prstDash val="solid"/>
                     </a:lnB>
                     <a:solidFill>
-                      <a:srgbClr val="FBEFF1"/>
+                      <a:srgbClr val="FCF3F4"/>
                     </a:solidFill>
                   </a:tcPr>
                 </a:tc>
@@ -3742,7 +3742,7 @@
                       <a:r>
                         <a:rPr sz="1500" b="1">
                           <a:solidFill>
-                            <a:srgbClr val="7A1F2E"/>
+                            <a:srgbClr val="721D2B"/>
                           </a:solidFill>
                         </a:rPr>
                         <a:t>생일</a:t>
@@ -3752,30 +3752,30 @@
                   <a:tcPr anchor="ctr" marL="73152" marR="73152">
                     <a:lnL w="9525" cap="flat" cmpd="sng" algn="ctr">
                       <a:solidFill>
-                        <a:srgbClr val="F4CDD3"/>
+                        <a:srgbClr val="F7D4DA"/>
                       </a:solidFill>
                       <a:prstDash val="solid"/>
                     </a:lnL>
                     <a:lnR w="9525" cap="flat" cmpd="sng" algn="ctr">
                       <a:solidFill>
-                        <a:srgbClr val="F4CDD3"/>
+                        <a:srgbClr val="F7D4DA"/>
                       </a:solidFill>
                       <a:prstDash val="solid"/>
                     </a:lnR>
                     <a:lnT w="9525" cap="flat" cmpd="sng" algn="ctr">
                       <a:solidFill>
-                        <a:srgbClr val="F4CDD3"/>
+                        <a:srgbClr val="F7D4DA"/>
                       </a:solidFill>
                       <a:prstDash val="solid"/>
                     </a:lnT>
                     <a:lnB w="9525" cap="flat" cmpd="sng" algn="ctr">
                       <a:solidFill>
-                        <a:srgbClr val="F4CDD3"/>
+                        <a:srgbClr val="F7D4DA"/>
                       </a:solidFill>
                       <a:prstDash val="solid"/>
                     </a:lnB>
                     <a:solidFill>
-                      <a:srgbClr val="F4CDD3"/>
+                      <a:srgbClr val="F7D4DA"/>
                     </a:solidFill>
                   </a:tcPr>
                 </a:tc>
@@ -3798,25 +3798,25 @@
                   <a:tcPr anchor="ctr" marL="73152" marR="73152">
                     <a:lnL w="9525" cap="flat" cmpd="sng" algn="ctr">
                       <a:solidFill>
-                        <a:srgbClr val="F4CDD3"/>
+                        <a:srgbClr val="F7D4DA"/>
                       </a:solidFill>
                       <a:prstDash val="solid"/>
                     </a:lnL>
                     <a:lnR w="9525" cap="flat" cmpd="sng" algn="ctr">
                       <a:solidFill>
-                        <a:srgbClr val="F4CDD3"/>
+                        <a:srgbClr val="F7D4DA"/>
                       </a:solidFill>
                       <a:prstDash val="solid"/>
                     </a:lnR>
                     <a:lnT w="9525" cap="flat" cmpd="sng" algn="ctr">
                       <a:solidFill>
-                        <a:srgbClr val="F4CDD3"/>
+                        <a:srgbClr val="F7D4DA"/>
                       </a:solidFill>
                       <a:prstDash val="solid"/>
                     </a:lnT>
                     <a:lnB w="9525" cap="flat" cmpd="sng" algn="ctr">
                       <a:solidFill>
-                        <a:srgbClr val="F4CDD3"/>
+                        <a:srgbClr val="F7D4DA"/>
                       </a:solidFill>
                       <a:prstDash val="solid"/>
                     </a:lnB>
@@ -3836,7 +3836,7 @@
                       <a:r>
                         <a:rPr sz="1500" b="1">
                           <a:solidFill>
-                            <a:srgbClr val="7A1F2E"/>
+                            <a:srgbClr val="721D2B"/>
                           </a:solidFill>
                         </a:rPr>
                         <a:t>키 · 몸무게</a:t>
@@ -3846,30 +3846,30 @@
                   <a:tcPr anchor="ctr" marL="73152" marR="73152">
                     <a:lnL w="9525" cap="flat" cmpd="sng" algn="ctr">
                       <a:solidFill>
-                        <a:srgbClr val="F4CDD3"/>
+                        <a:srgbClr val="F7D4DA"/>
                       </a:solidFill>
                       <a:prstDash val="solid"/>
                     </a:lnL>
                     <a:lnR w="9525" cap="flat" cmpd="sng" algn="ctr">
                       <a:solidFill>
-                        <a:srgbClr val="F4CDD3"/>
+                        <a:srgbClr val="F7D4DA"/>
                       </a:solidFill>
                       <a:prstDash val="solid"/>
                     </a:lnR>
                     <a:lnT w="9525" cap="flat" cmpd="sng" algn="ctr">
                       <a:solidFill>
-                        <a:srgbClr val="F4CDD3"/>
+                        <a:srgbClr val="F7D4DA"/>
                       </a:solidFill>
                       <a:prstDash val="solid"/>
                     </a:lnT>
                     <a:lnB w="9525" cap="flat" cmpd="sng" algn="ctr">
                       <a:solidFill>
-                        <a:srgbClr val="F4CDD3"/>
+                        <a:srgbClr val="F7D4DA"/>
                       </a:solidFill>
                       <a:prstDash val="solid"/>
                     </a:lnB>
                     <a:solidFill>
-                      <a:srgbClr val="F4CDD3"/>
+                      <a:srgbClr val="F7D4DA"/>
                     </a:solidFill>
                   </a:tcPr>
                 </a:tc>
@@ -3892,30 +3892,30 @@
                   <a:tcPr anchor="ctr" marL="73152" marR="73152">
                     <a:lnL w="9525" cap="flat" cmpd="sng" algn="ctr">
                       <a:solidFill>
-                        <a:srgbClr val="F4CDD3"/>
+                        <a:srgbClr val="F7D4DA"/>
                       </a:solidFill>
                       <a:prstDash val="solid"/>
                     </a:lnL>
                     <a:lnR w="9525" cap="flat" cmpd="sng" algn="ctr">
                       <a:solidFill>
-                        <a:srgbClr val="F4CDD3"/>
+                        <a:srgbClr val="F7D4DA"/>
                       </a:solidFill>
                       <a:prstDash val="solid"/>
                     </a:lnR>
                     <a:lnT w="9525" cap="flat" cmpd="sng" algn="ctr">
                       <a:solidFill>
-                        <a:srgbClr val="F4CDD3"/>
+                        <a:srgbClr val="F7D4DA"/>
                       </a:solidFill>
                       <a:prstDash val="solid"/>
                     </a:lnT>
                     <a:lnB w="9525" cap="flat" cmpd="sng" algn="ctr">
                       <a:solidFill>
-                        <a:srgbClr val="F4CDD3"/>
+                        <a:srgbClr val="F7D4DA"/>
                       </a:solidFill>
                       <a:prstDash val="solid"/>
                     </a:lnB>
                     <a:solidFill>
-                      <a:srgbClr val="FBEFF1"/>
+                      <a:srgbClr val="FCF3F4"/>
                     </a:solidFill>
                   </a:tcPr>
                 </a:tc>
@@ -3930,7 +3930,7 @@
                       <a:r>
                         <a:rPr sz="1500" b="1">
                           <a:solidFill>
-                            <a:srgbClr val="7A1F2E"/>
+                            <a:srgbClr val="721D2B"/>
                           </a:solidFill>
                         </a:rPr>
                         <a:t>좋아하는 것</a:t>
@@ -3940,30 +3940,30 @@
                   <a:tcPr anchor="ctr" marL="73152" marR="73152">
                     <a:lnL w="9525" cap="flat" cmpd="sng" algn="ctr">
                       <a:solidFill>
-                        <a:srgbClr val="F4CDD3"/>
+                        <a:srgbClr val="F7D4DA"/>
                       </a:solidFill>
                       <a:prstDash val="solid"/>
                     </a:lnL>
                     <a:lnR w="9525" cap="flat" cmpd="sng" algn="ctr">
                       <a:solidFill>
-                        <a:srgbClr val="F4CDD3"/>
+                        <a:srgbClr val="F7D4DA"/>
                       </a:solidFill>
                       <a:prstDash val="solid"/>
                     </a:lnR>
                     <a:lnT w="9525" cap="flat" cmpd="sng" algn="ctr">
                       <a:solidFill>
-                        <a:srgbClr val="F4CDD3"/>
+                        <a:srgbClr val="F7D4DA"/>
                       </a:solidFill>
                       <a:prstDash val="solid"/>
                     </a:lnT>
                     <a:lnB w="9525" cap="flat" cmpd="sng" algn="ctr">
                       <a:solidFill>
-                        <a:srgbClr val="F4CDD3"/>
+                        <a:srgbClr val="F7D4DA"/>
                       </a:solidFill>
                       <a:prstDash val="solid"/>
                     </a:lnB>
                     <a:solidFill>
-                      <a:srgbClr val="F4CDD3"/>
+                      <a:srgbClr val="F7D4DA"/>
                     </a:solidFill>
                   </a:tcPr>
                 </a:tc>
@@ -3986,25 +3986,25 @@
                   <a:tcPr anchor="ctr" marL="73152" marR="73152">
                     <a:lnL w="9525" cap="flat" cmpd="sng" algn="ctr">
                       <a:solidFill>
-                        <a:srgbClr val="F4CDD3"/>
+                        <a:srgbClr val="F7D4DA"/>
                       </a:solidFill>
                       <a:prstDash val="solid"/>
                     </a:lnL>
                     <a:lnR w="9525" cap="flat" cmpd="sng" algn="ctr">
                       <a:solidFill>
-                        <a:srgbClr val="F4CDD3"/>
+                        <a:srgbClr val="F7D4DA"/>
                       </a:solidFill>
                       <a:prstDash val="solid"/>
                     </a:lnR>
                     <a:lnT w="9525" cap="flat" cmpd="sng" algn="ctr">
                       <a:solidFill>
-                        <a:srgbClr val="F4CDD3"/>
+                        <a:srgbClr val="F7D4DA"/>
                       </a:solidFill>
                       <a:prstDash val="solid"/>
                     </a:lnT>
                     <a:lnB w="9525" cap="flat" cmpd="sng" algn="ctr">
                       <a:solidFill>
-                        <a:srgbClr val="F4CDD3"/>
+                        <a:srgbClr val="F7D4DA"/>
                       </a:solidFill>
                       <a:prstDash val="solid"/>
                     </a:lnB>
@@ -4024,7 +4024,7 @@
                       <a:r>
                         <a:rPr sz="1500" b="1">
                           <a:solidFill>
-                            <a:srgbClr val="7A1F2E"/>
+                            <a:srgbClr val="721D2B"/>
                           </a:solidFill>
                         </a:rPr>
                         <a:t>별명</a:t>
@@ -4034,30 +4034,30 @@
                   <a:tcPr anchor="ctr" marL="73152" marR="73152">
                     <a:lnL w="9525" cap="flat" cmpd="sng" algn="ctr">
                       <a:solidFill>
-                        <a:srgbClr val="F4CDD3"/>
+                        <a:srgbClr val="F7D4DA"/>
                       </a:solidFill>
                       <a:prstDash val="solid"/>
                     </a:lnL>
                     <a:lnR w="9525" cap="flat" cmpd="sng" algn="ctr">
                       <a:solidFill>
-                        <a:srgbClr val="F4CDD3"/>
+                        <a:srgbClr val="F7D4DA"/>
                       </a:solidFill>
                       <a:prstDash val="solid"/>
                     </a:lnR>
                     <a:lnT w="9525" cap="flat" cmpd="sng" algn="ctr">
                       <a:solidFill>
-                        <a:srgbClr val="F4CDD3"/>
+                        <a:srgbClr val="F7D4DA"/>
                       </a:solidFill>
                       <a:prstDash val="solid"/>
                     </a:lnT>
                     <a:lnB w="9525" cap="flat" cmpd="sng" algn="ctr">
                       <a:solidFill>
-                        <a:srgbClr val="F4CDD3"/>
+                        <a:srgbClr val="F7D4DA"/>
                       </a:solidFill>
                       <a:prstDash val="solid"/>
                     </a:lnB>
                     <a:solidFill>
-                      <a:srgbClr val="F4CDD3"/>
+                      <a:srgbClr val="F7D4DA"/>
                     </a:solidFill>
                   </a:tcPr>
                 </a:tc>
@@ -4080,30 +4080,30 @@
                   <a:tcPr anchor="ctr" marL="73152" marR="73152">
                     <a:lnL w="9525" cap="flat" cmpd="sng" algn="ctr">
                       <a:solidFill>
-                        <a:srgbClr val="F4CDD3"/>
+                        <a:srgbClr val="F7D4DA"/>
                       </a:solidFill>
                       <a:prstDash val="solid"/>
                     </a:lnL>
                     <a:lnR w="9525" cap="flat" cmpd="sng" algn="ctr">
                       <a:solidFill>
-                        <a:srgbClr val="F4CDD3"/>
+                        <a:srgbClr val="F7D4DA"/>
                       </a:solidFill>
                       <a:prstDash val="solid"/>
                     </a:lnR>
                     <a:lnT w="9525" cap="flat" cmpd="sng" algn="ctr">
                       <a:solidFill>
-                        <a:srgbClr val="F4CDD3"/>
+                        <a:srgbClr val="F7D4DA"/>
                       </a:solidFill>
                       <a:prstDash val="solid"/>
                     </a:lnT>
                     <a:lnB w="9525" cap="flat" cmpd="sng" algn="ctr">
                       <a:solidFill>
-                        <a:srgbClr val="F4CDD3"/>
+                        <a:srgbClr val="F7D4DA"/>
                       </a:solidFill>
                       <a:prstDash val="solid"/>
                     </a:lnB>
                     <a:solidFill>
-                      <a:srgbClr val="FBEFF1"/>
+                      <a:srgbClr val="FCF3F4"/>
                     </a:solidFill>
                   </a:tcPr>
                 </a:tc>
@@ -4118,7 +4118,7 @@
                       <a:r>
                         <a:rPr sz="1500" b="1">
                           <a:solidFill>
-                            <a:srgbClr val="7A1F2E"/>
+                            <a:srgbClr val="721D2B"/>
                           </a:solidFill>
                         </a:rPr>
                         <a:t>부모의 마음</a:t>
@@ -4128,30 +4128,30 @@
                   <a:tcPr anchor="ctr" marL="73152" marR="73152">
                     <a:lnL w="9525" cap="flat" cmpd="sng" algn="ctr">
                       <a:solidFill>
-                        <a:srgbClr val="F4CDD3"/>
+                        <a:srgbClr val="F7D4DA"/>
                       </a:solidFill>
                       <a:prstDash val="solid"/>
                     </a:lnL>
                     <a:lnR w="9525" cap="flat" cmpd="sng" algn="ctr">
                       <a:solidFill>
-                        <a:srgbClr val="F4CDD3"/>
+                        <a:srgbClr val="F7D4DA"/>
                       </a:solidFill>
                       <a:prstDash val="solid"/>
                     </a:lnR>
                     <a:lnT w="9525" cap="flat" cmpd="sng" algn="ctr">
                       <a:solidFill>
-                        <a:srgbClr val="F4CDD3"/>
+                        <a:srgbClr val="F7D4DA"/>
                       </a:solidFill>
                       <a:prstDash val="solid"/>
                     </a:lnT>
                     <a:lnB w="9525" cap="flat" cmpd="sng" algn="ctr">
                       <a:solidFill>
-                        <a:srgbClr val="F4CDD3"/>
+                        <a:srgbClr val="F7D4DA"/>
                       </a:solidFill>
                       <a:prstDash val="solid"/>
                     </a:lnB>
                     <a:solidFill>
-                      <a:srgbClr val="F4CDD3"/>
+                      <a:srgbClr val="F7D4DA"/>
                     </a:solidFill>
                   </a:tcPr>
                 </a:tc>
@@ -4174,25 +4174,25 @@
                   <a:tcPr anchor="ctr" marL="73152" marR="73152">
                     <a:lnL w="9525" cap="flat" cmpd="sng" algn="ctr">
                       <a:solidFill>
-                        <a:srgbClr val="F4CDD3"/>
+                        <a:srgbClr val="F7D4DA"/>
                       </a:solidFill>
                       <a:prstDash val="solid"/>
                     </a:lnL>
                     <a:lnR w="9525" cap="flat" cmpd="sng" algn="ctr">
                       <a:solidFill>
-                        <a:srgbClr val="F4CDD3"/>
+                        <a:srgbClr val="F7D4DA"/>
                       </a:solidFill>
                       <a:prstDash val="solid"/>
                     </a:lnR>
                     <a:lnT w="9525" cap="flat" cmpd="sng" algn="ctr">
                       <a:solidFill>
-                        <a:srgbClr val="F4CDD3"/>
+                        <a:srgbClr val="F7D4DA"/>
                       </a:solidFill>
                       <a:prstDash val="solid"/>
                     </a:lnT>
                     <a:lnB w="9525" cap="flat" cmpd="sng" algn="ctr">
                       <a:solidFill>
-                        <a:srgbClr val="F4CDD3"/>
+                        <a:srgbClr val="F7D4DA"/>
                       </a:solidFill>
                       <a:prstDash val="solid"/>
                     </a:lnB>
@@ -4220,7 +4220,7 @@
     <p:bg>
       <p:bgPr>
         <a:solidFill>
-          <a:srgbClr val="FBEFF1"/>
+          <a:srgbClr val="FCF3F4"/>
         </a:solidFill>
         <a:effectLst/>
       </p:bgPr>
@@ -4249,7 +4249,7 @@
           <a:noFill/>
           <a:ln w="28575">
             <a:solidFill>
-              <a:srgbClr val="CC334D"/>
+              <a:srgbClr val="DF3A55"/>
             </a:solidFill>
           </a:ln>
         </p:spPr>
@@ -4278,7 +4278,7 @@
           <a:noFill/>
           <a:ln w="9525">
             <a:solidFill>
-              <a:srgbClr val="F4CDD3"/>
+              <a:srgbClr val="F7D4DA"/>
             </a:solidFill>
           </a:ln>
         </p:spPr>
@@ -4320,7 +4320,7 @@
             <a:r>
               <a:rPr sz="3000" b="1" i="0">
                 <a:solidFill>
-                  <a:srgbClr val="7A1F2E"/>
+                  <a:srgbClr val="721D2B"/>
                 </a:solidFill>
               </a:rPr>
               <a:t>태어난 날 이야기</a:t>
@@ -4343,7 +4343,7 @@
             <a:avLst/>
           </a:prstGeom>
           <a:solidFill>
-            <a:srgbClr val="F4CDD3"/>
+            <a:srgbClr val="F7D4DA"/>
           </a:solidFill>
           <a:ln>
             <a:noFill/>
@@ -4372,7 +4372,7 @@
             <a:avLst/>
           </a:prstGeom>
           <a:solidFill>
-            <a:srgbClr val="CC334D"/>
+            <a:srgbClr val="DF3A55"/>
           </a:solidFill>
           <a:ln w="38100">
             <a:solidFill>
@@ -4418,7 +4418,7 @@
             <a:r>
               <a:rPr sz="1600" b="1" i="0">
                 <a:solidFill>
-                  <a:srgbClr val="CC334D"/>
+                  <a:srgbClr val="DF3A55"/>
                 </a:solidFill>
               </a:rPr>
               <a:t>임신</a:t>
@@ -4456,7 +4456,7 @@
             <a:r>
               <a:rPr sz="1800" b="1" i="0">
                 <a:solidFill>
-                  <a:srgbClr val="7A1F2E"/>
+                  <a:srgbClr val="721D2B"/>
                 </a:solidFill>
               </a:rPr>
               <a:t>소식을 들은 날</a:t>
@@ -4517,7 +4517,7 @@
             <a:avLst/>
           </a:prstGeom>
           <a:solidFill>
-            <a:srgbClr val="CC334D"/>
+            <a:srgbClr val="DF3A55"/>
           </a:solidFill>
           <a:ln w="38100">
             <a:solidFill>
@@ -4563,7 +4563,7 @@
             <a:r>
               <a:rPr sz="1600" b="1" i="0">
                 <a:solidFill>
-                  <a:srgbClr val="CC334D"/>
+                  <a:srgbClr val="DF3A55"/>
                 </a:solidFill>
               </a:rPr>
               <a:t>출산</a:t>
@@ -4601,7 +4601,7 @@
             <a:r>
               <a:rPr sz="1800" b="1" i="0">
                 <a:solidFill>
-                  <a:srgbClr val="7A1F2E"/>
+                  <a:srgbClr val="721D2B"/>
                 </a:solidFill>
               </a:rPr>
               <a:t>태어난 날</a:t>
@@ -4662,7 +4662,7 @@
             <a:avLst/>
           </a:prstGeom>
           <a:solidFill>
-            <a:srgbClr val="CC334D"/>
+            <a:srgbClr val="DF3A55"/>
           </a:solidFill>
           <a:ln w="38100">
             <a:solidFill>
@@ -4708,7 +4708,7 @@
             <a:r>
               <a:rPr sz="1600" b="1" i="0">
                 <a:solidFill>
-                  <a:srgbClr val="CC334D"/>
+                  <a:srgbClr val="DF3A55"/>
                 </a:solidFill>
               </a:rPr>
               <a:t>첫 만남</a:t>
@@ -4746,7 +4746,7 @@
             <a:r>
               <a:rPr sz="1800" b="1" i="0">
                 <a:solidFill>
-                  <a:srgbClr val="7A1F2E"/>
+                  <a:srgbClr val="721D2B"/>
                 </a:solidFill>
               </a:rPr>
               <a:t>품에 안은 순간</a:t>
@@ -4807,7 +4807,7 @@
             <a:avLst/>
           </a:prstGeom>
           <a:solidFill>
-            <a:srgbClr val="CC334D"/>
+            <a:srgbClr val="DF3A55"/>
           </a:solidFill>
           <a:ln w="38100">
             <a:solidFill>
@@ -4853,7 +4853,7 @@
             <a:r>
               <a:rPr sz="1600" b="1" i="0">
                 <a:solidFill>
-                  <a:srgbClr val="CC334D"/>
+                  <a:srgbClr val="DF3A55"/>
                 </a:solidFill>
               </a:rPr>
               <a:t>집으로</a:t>
@@ -4891,7 +4891,7 @@
             <a:r>
               <a:rPr sz="1800" b="1" i="0">
                 <a:solidFill>
-                  <a:srgbClr val="7A1F2E"/>
+                  <a:srgbClr val="721D2B"/>
                 </a:solidFill>
               </a:rPr>
               <a:t>함께 돌아온 날</a:t>
@@ -4951,7 +4951,7 @@
     <p:bg>
       <p:bgPr>
         <a:solidFill>
-          <a:srgbClr val="FBEFF1"/>
+          <a:srgbClr val="FCF3F4"/>
         </a:solidFill>
         <a:effectLst/>
       </p:bgPr>
@@ -4980,7 +4980,7 @@
           <a:noFill/>
           <a:ln w="28575">
             <a:solidFill>
-              <a:srgbClr val="CC334D"/>
+              <a:srgbClr val="DF3A55"/>
             </a:solidFill>
           </a:ln>
         </p:spPr>
@@ -5009,7 +5009,7 @@
           <a:noFill/>
           <a:ln w="9525">
             <a:solidFill>
-              <a:srgbClr val="F4CDD3"/>
+              <a:srgbClr val="F7D4DA"/>
             </a:solidFill>
           </a:ln>
         </p:spPr>
@@ -5051,7 +5051,7 @@
             <a:r>
               <a:rPr sz="3000" b="1" i="0">
                 <a:solidFill>
-                  <a:srgbClr val="7A1F2E"/>
+                  <a:srgbClr val="721D2B"/>
                 </a:solidFill>
               </a:rPr>
               <a:t>첫 번째 순간들</a:t>
@@ -5076,11 +5076,11 @@
             </a:avLst>
           </a:prstGeom>
           <a:solidFill>
-            <a:srgbClr val="FBEFF1"/>
+            <a:srgbClr val="FCF3F4"/>
           </a:solidFill>
           <a:ln w="15875">
             <a:solidFill>
-              <a:srgbClr val="F4CDD3"/>
+              <a:srgbClr val="F7D4DA"/>
             </a:solidFill>
           </a:ln>
         </p:spPr>
@@ -5107,7 +5107,7 @@
             <a:avLst/>
           </a:prstGeom>
           <a:solidFill>
-            <a:srgbClr val="CC334D"/>
+            <a:srgbClr val="DF3A55"/>
           </a:solidFill>
           <a:ln>
             <a:noFill/>
@@ -5165,7 +5165,7 @@
             <a:r>
               <a:rPr sz="1800" b="1" i="0">
                 <a:solidFill>
-                  <a:srgbClr val="7A1F2E"/>
+                  <a:srgbClr val="721D2B"/>
                 </a:solidFill>
               </a:rPr>
               <a:t>첫 웃음</a:t>
@@ -5228,11 +5228,11 @@
             </a:avLst>
           </a:prstGeom>
           <a:solidFill>
-            <a:srgbClr val="FBEFF1"/>
+            <a:srgbClr val="FCF3F4"/>
           </a:solidFill>
           <a:ln w="15875">
             <a:solidFill>
-              <a:srgbClr val="F4CDD3"/>
+              <a:srgbClr val="F7D4DA"/>
             </a:solidFill>
           </a:ln>
         </p:spPr>
@@ -5259,7 +5259,7 @@
             <a:avLst/>
           </a:prstGeom>
           <a:solidFill>
-            <a:srgbClr val="CC334D"/>
+            <a:srgbClr val="DF3A55"/>
           </a:solidFill>
           <a:ln>
             <a:noFill/>
@@ -5317,7 +5317,7 @@
             <a:r>
               <a:rPr sz="1800" b="1" i="0">
                 <a:solidFill>
-                  <a:srgbClr val="7A1F2E"/>
+                  <a:srgbClr val="721D2B"/>
                 </a:solidFill>
               </a:rPr>
               <a:t>첫 뒤집기</a:t>
@@ -5380,11 +5380,11 @@
             </a:avLst>
           </a:prstGeom>
           <a:solidFill>
-            <a:srgbClr val="FBEFF1"/>
+            <a:srgbClr val="FCF3F4"/>
           </a:solidFill>
           <a:ln w="15875">
             <a:solidFill>
-              <a:srgbClr val="F4CDD3"/>
+              <a:srgbClr val="F7D4DA"/>
             </a:solidFill>
           </a:ln>
         </p:spPr>
@@ -5411,7 +5411,7 @@
             <a:avLst/>
           </a:prstGeom>
           <a:solidFill>
-            <a:srgbClr val="CC334D"/>
+            <a:srgbClr val="DF3A55"/>
           </a:solidFill>
           <a:ln>
             <a:noFill/>
@@ -5469,7 +5469,7 @@
             <a:r>
               <a:rPr sz="1800" b="1" i="0">
                 <a:solidFill>
-                  <a:srgbClr val="7A1F2E"/>
+                  <a:srgbClr val="721D2B"/>
                 </a:solidFill>
               </a:rPr>
               <a:t>첫 이</a:t>
@@ -5532,11 +5532,11 @@
             </a:avLst>
           </a:prstGeom>
           <a:solidFill>
-            <a:srgbClr val="FBEFF1"/>
+            <a:srgbClr val="FCF3F4"/>
           </a:solidFill>
           <a:ln w="15875">
             <a:solidFill>
-              <a:srgbClr val="F4CDD3"/>
+              <a:srgbClr val="F7D4DA"/>
             </a:solidFill>
           </a:ln>
         </p:spPr>
@@ -5563,7 +5563,7 @@
             <a:avLst/>
           </a:prstGeom>
           <a:solidFill>
-            <a:srgbClr val="CC334D"/>
+            <a:srgbClr val="DF3A55"/>
           </a:solidFill>
           <a:ln>
             <a:noFill/>
@@ -5621,7 +5621,7 @@
             <a:r>
               <a:rPr sz="1800" b="1" i="0">
                 <a:solidFill>
-                  <a:srgbClr val="7A1F2E"/>
+                  <a:srgbClr val="721D2B"/>
                 </a:solidFill>
               </a:rPr>
               <a:t>첫 걸음</a:t>
@@ -5681,7 +5681,7 @@
     <p:bg>
       <p:bgPr>
         <a:solidFill>
-          <a:srgbClr val="FBEFF1"/>
+          <a:srgbClr val="FCF3F4"/>
         </a:solidFill>
         <a:effectLst/>
       </p:bgPr>
@@ -5710,7 +5710,7 @@
           <a:noFill/>
           <a:ln w="28575">
             <a:solidFill>
-              <a:srgbClr val="CC334D"/>
+              <a:srgbClr val="DF3A55"/>
             </a:solidFill>
           </a:ln>
         </p:spPr>
@@ -5739,7 +5739,7 @@
           <a:noFill/>
           <a:ln w="9525">
             <a:solidFill>
-              <a:srgbClr val="F4CDD3"/>
+              <a:srgbClr val="F7D4DA"/>
             </a:solidFill>
           </a:ln>
         </p:spPr>
@@ -5781,7 +5781,7 @@
             <a:r>
               <a:rPr sz="3000" b="1" i="0">
                 <a:solidFill>
-                  <a:srgbClr val="7A1F2E"/>
+                  <a:srgbClr val="721D2B"/>
                 </a:solidFill>
               </a:rPr>
               <a:t>사진 모음</a:t>
@@ -5806,11 +5806,11 @@
             </a:avLst>
           </a:prstGeom>
           <a:solidFill>
-            <a:srgbClr val="F4CDD3"/>
+            <a:srgbClr val="F7D4DA"/>
           </a:solidFill>
           <a:ln w="19050">
             <a:solidFill>
-              <a:srgbClr val="CC334D"/>
+              <a:srgbClr val="DF3A55"/>
             </a:solidFill>
             <a:prstDash val="dash"/>
           </a:ln>
@@ -5829,7 +5829,7 @@
             <a:r>
               <a:rPr sz="1200" b="0" i="0">
                 <a:solidFill>
-                  <a:srgbClr val="7A1F2E"/>
+                  <a:srgbClr val="721D2B"/>
                 </a:solidFill>
               </a:rPr>
               <a:t>사진 1</a:t>
@@ -5854,11 +5854,11 @@
             </a:avLst>
           </a:prstGeom>
           <a:solidFill>
-            <a:srgbClr val="F4CDD3"/>
+            <a:srgbClr val="F7D4DA"/>
           </a:solidFill>
           <a:ln w="19050">
             <a:solidFill>
-              <a:srgbClr val="CC334D"/>
+              <a:srgbClr val="DF3A55"/>
             </a:solidFill>
             <a:prstDash val="dash"/>
           </a:ln>
@@ -5877,7 +5877,7 @@
             <a:r>
               <a:rPr sz="1200" b="0" i="0">
                 <a:solidFill>
-                  <a:srgbClr val="7A1F2E"/>
+                  <a:srgbClr val="721D2B"/>
                 </a:solidFill>
               </a:rPr>
               <a:t>사진 2</a:t>
@@ -5902,11 +5902,11 @@
             </a:avLst>
           </a:prstGeom>
           <a:solidFill>
-            <a:srgbClr val="F4CDD3"/>
+            <a:srgbClr val="F7D4DA"/>
           </a:solidFill>
           <a:ln w="19050">
             <a:solidFill>
-              <a:srgbClr val="CC334D"/>
+              <a:srgbClr val="DF3A55"/>
             </a:solidFill>
             <a:prstDash val="dash"/>
           </a:ln>
@@ -5925,7 +5925,7 @@
             <a:r>
               <a:rPr sz="1200" b="0" i="0">
                 <a:solidFill>
-                  <a:srgbClr val="7A1F2E"/>
+                  <a:srgbClr val="721D2B"/>
                 </a:solidFill>
               </a:rPr>
               <a:t>사진 3</a:t>
@@ -5950,11 +5950,11 @@
             </a:avLst>
           </a:prstGeom>
           <a:solidFill>
-            <a:srgbClr val="F4CDD3"/>
+            <a:srgbClr val="F7D4DA"/>
           </a:solidFill>
           <a:ln w="19050">
             <a:solidFill>
-              <a:srgbClr val="CC334D"/>
+              <a:srgbClr val="DF3A55"/>
             </a:solidFill>
             <a:prstDash val="dash"/>
           </a:ln>
@@ -5973,7 +5973,7 @@
             <a:r>
               <a:rPr sz="1200" b="0" i="0">
                 <a:solidFill>
-                  <a:srgbClr val="7A1F2E"/>
+                  <a:srgbClr val="721D2B"/>
                 </a:solidFill>
               </a:rPr>
               <a:t>사진 4</a:t>
@@ -5998,11 +5998,11 @@
             </a:avLst>
           </a:prstGeom>
           <a:solidFill>
-            <a:srgbClr val="F4CDD3"/>
+            <a:srgbClr val="F7D4DA"/>
           </a:solidFill>
           <a:ln w="19050">
             <a:solidFill>
-              <a:srgbClr val="CC334D"/>
+              <a:srgbClr val="DF3A55"/>
             </a:solidFill>
             <a:prstDash val="dash"/>
           </a:ln>
@@ -6021,7 +6021,7 @@
             <a:r>
               <a:rPr sz="1200" b="0" i="0">
                 <a:solidFill>
-                  <a:srgbClr val="7A1F2E"/>
+                  <a:srgbClr val="721D2B"/>
                 </a:solidFill>
               </a:rPr>
               <a:t>사진 5</a:t>
@@ -6046,11 +6046,11 @@
             </a:avLst>
           </a:prstGeom>
           <a:solidFill>
-            <a:srgbClr val="F4CDD3"/>
+            <a:srgbClr val="F7D4DA"/>
           </a:solidFill>
           <a:ln w="19050">
             <a:solidFill>
-              <a:srgbClr val="CC334D"/>
+              <a:srgbClr val="DF3A55"/>
             </a:solidFill>
             <a:prstDash val="dash"/>
           </a:ln>
@@ -6069,7 +6069,7 @@
             <a:r>
               <a:rPr sz="1200" b="0" i="0">
                 <a:solidFill>
-                  <a:srgbClr val="7A1F2E"/>
+                  <a:srgbClr val="721D2B"/>
                 </a:solidFill>
               </a:rPr>
               <a:t>사진 6</a:t>
@@ -6094,11 +6094,11 @@
             </a:avLst>
           </a:prstGeom>
           <a:solidFill>
-            <a:srgbClr val="F4CDD3"/>
+            <a:srgbClr val="F7D4DA"/>
           </a:solidFill>
           <a:ln w="19050">
             <a:solidFill>
-              <a:srgbClr val="CC334D"/>
+              <a:srgbClr val="DF3A55"/>
             </a:solidFill>
             <a:prstDash val="dash"/>
           </a:ln>
@@ -6117,7 +6117,7 @@
             <a:r>
               <a:rPr sz="1200" b="0" i="0">
                 <a:solidFill>
-                  <a:srgbClr val="7A1F2E"/>
+                  <a:srgbClr val="721D2B"/>
                 </a:solidFill>
               </a:rPr>
               <a:t>사진 7</a:t>
@@ -6142,11 +6142,11 @@
             </a:avLst>
           </a:prstGeom>
           <a:solidFill>
-            <a:srgbClr val="F4CDD3"/>
+            <a:srgbClr val="F7D4DA"/>
           </a:solidFill>
           <a:ln w="19050">
             <a:solidFill>
-              <a:srgbClr val="CC334D"/>
+              <a:srgbClr val="DF3A55"/>
             </a:solidFill>
             <a:prstDash val="dash"/>
           </a:ln>
@@ -6165,7 +6165,7 @@
             <a:r>
               <a:rPr sz="1200" b="0" i="0">
                 <a:solidFill>
-                  <a:srgbClr val="7A1F2E"/>
+                  <a:srgbClr val="721D2B"/>
                 </a:solidFill>
               </a:rPr>
               <a:t>사진 8</a:t>
@@ -6245,7 +6245,7 @@
             <a:r>
               <a:rPr sz="3400" b="1" i="0">
                 <a:solidFill>
-                  <a:srgbClr val="7A1F2E"/>
+                  <a:srgbClr val="721D2B"/>
                 </a:solidFill>
               </a:rPr>
               <a:t>와 주셔서 고맙습니다</a:t>
@@ -6283,7 +6283,7 @@
             <a:r>
               <a:rPr sz="1700" b="0" i="1">
                 <a:solidFill>
-                  <a:srgbClr val="7A1F2E"/>
+                  <a:srgbClr val="721D2B"/>
                 </a:solidFill>
               </a:rPr>
               <a:t>아이가 한 살이 되었습니다</a:t>
@@ -6348,34 +6348,34 @@
         <a:sysClr val="window" lastClr="FFFFFF"/>
       </a:lt1>
       <a:dk2>
-        <a:srgbClr val="7A1F2E"/>
+        <a:srgbClr val="721D2B"/>
       </a:dk2>
       <a:lt2>
-        <a:srgbClr val="FBEFF1"/>
+        <a:srgbClr val="FCF3F4"/>
       </a:lt2>
       <a:accent1>
-        <a:srgbClr val="CC334D"/>
+        <a:srgbClr val="DF3A55"/>
       </a:accent1>
       <a:accent2>
-        <a:srgbClr val="3B9158"/>
+        <a:srgbClr val="339941"/>
       </a:accent2>
       <a:accent3>
-        <a:srgbClr val="7A1F2E"/>
+        <a:srgbClr val="721D2B"/>
       </a:accent3>
       <a:accent4>
-        <a:srgbClr val="F4CDD3"/>
+        <a:srgbClr val="F7D4DA"/>
       </a:accent4>
       <a:accent5>
-        <a:srgbClr val="846252"/>
+        <a:srgbClr val="896A4B"/>
       </a:accent5>
       <a:accent6>
-        <a:srgbClr val="AF7982"/>
+        <a:srgbClr val="AA7780"/>
       </a:accent6>
       <a:hlink>
-        <a:srgbClr val="CC334D"/>
+        <a:srgbClr val="DF3A55"/>
       </a:hlink>
       <a:folHlink>
-        <a:srgbClr val="7A1F2E"/>
+        <a:srgbClr val="721D2B"/>
       </a:folHlink>
     </a:clrScheme>
     <a:fontScheme name="Office">

--- a/public/fun/pack/pptx/birthday/돌잔치_10_첫번째이야기중심_어버이날꽃.pptx
+++ b/public/fun/pack/pptx/birthday/돌잔치_10_첫번째이야기중심_어버이날꽃.pptx
@@ -3286,6 +3286,14 @@
 <file path=ppt/slides/slide1.xml><?xml version="1.0" encoding="utf-8"?>
 <p:sld xmlns:a="http://schemas.openxmlformats.org/drawingml/2006/main" xmlns:p="http://schemas.openxmlformats.org/presentationml/2006/main" xmlns:r="http://schemas.openxmlformats.org/officeDocument/2006/relationships">
   <p:cSld>
+    <p:bg>
+      <p:bgPr>
+        <a:solidFill>
+          <a:srgbClr val="FDEAED"/>
+        </a:solidFill>
+        <a:effectLst/>
+      </p:bgPr>
+    </p:bg>
     <p:spTree>
       <p:nvGrpSpPr>
         <p:cNvPr id="1" name=""/>
@@ -3293,30 +3301,120 @@
         <p:nvPr/>
       </p:nvGrpSpPr>
       <p:grpSpPr/>
-      <p:pic>
-        <p:nvPicPr>
-          <p:cNvPr id="3" name="표지 그림" descr="birthday-10.jpg"/>
-          <p:cNvPicPr>
-            <a:picLocks noChangeAspect="1"/>
-          </p:cNvPicPr>
+      <p:sp>
+        <p:nvSpPr>
+          <p:cNvPr id="3" name="사진 자리"/>
+          <p:cNvSpPr/>
           <p:nvPr/>
-        </p:nvPicPr>
-        <p:blipFill>
-          <a:blip r:embed="rId2"/>
-          <a:stretch>
-            <a:fillRect/>
-          </a:stretch>
-        </p:blipFill>
-        <p:spPr>
-          <a:xfrm>
-            <a:off x="0" y="0"/>
-            <a:ext cx="12191695" cy="6858000"/>
+        </p:nvSpPr>
+        <p:spPr>
+          <a:xfrm>
+            <a:off x="1463003" y="960120"/>
+            <a:ext cx="3657508" cy="4526280"/>
+          </a:xfrm>
+          <a:prstGeom prst="roundRect">
+            <a:avLst>
+              <a:gd name="adj" fmla="val 4000"/>
+            </a:avLst>
+          </a:prstGeom>
+          <a:solidFill>
+            <a:srgbClr val="F2A6B3"/>
+          </a:solidFill>
+          <a:ln>
+            <a:noFill/>
+          </a:ln>
+        </p:spPr>
+        <p:txBody>
+          <a:bodyPr rtlCol="0" anchor="ctr" wrap="square" lIns="54864" rIns="54864" tIns="27432" bIns="27432">
+            <a:noAutofit/>
+          </a:bodyPr>
+          <a:lstStyle/>
+          <a:p>
+            <a:pPr algn="ctr">
+              <a:lnSpc>
+                <a:spcPct val="100000"/>
+              </a:lnSpc>
+            </a:pPr>
+            <a:r>
+              <a:rPr sz="1400" b="0" i="0">
+                <a:solidFill>
+                  <a:srgbClr val="49272D"/>
+                </a:solidFill>
+              </a:rPr>
+              <a:t>사진을 넣어 주세요</a:t>
+            </a:r>
+          </a:p>
+        </p:txBody>
+      </p:sp>
+      <p:sp>
+        <p:nvSpPr>
+          <p:cNvPr id="4" name="장식"/>
+          <p:cNvSpPr/>
+          <p:nvPr/>
+        </p:nvSpPr>
+        <p:spPr>
+          <a:xfrm>
+            <a:off x="975335" y="1234439"/>
+            <a:ext cx="3657508" cy="4526280"/>
+          </a:xfrm>
+          <a:prstGeom prst="roundRect">
+            <a:avLst>
+              <a:gd name="adj" fmla="val 4000"/>
+            </a:avLst>
+          </a:prstGeom>
+          <a:noFill/>
+          <a:ln w="9525">
+            <a:solidFill>
+              <a:srgbClr val="26231F"/>
+            </a:solidFill>
+          </a:ln>
+        </p:spPr>
+        <p:txBody>
+          <a:bodyPr rtlCol="0" anchor="ctr"/>
+          <a:lstStyle/>
+          <a:p>
+            <a:pPr algn="ctr"/>
+          </a:p>
+        </p:txBody>
+      </p:sp>
+      <p:sp>
+        <p:nvSpPr>
+          <p:cNvPr id="5" name="라벨"/>
+          <p:cNvSpPr txBox="1"/>
+          <p:nvPr/>
+        </p:nvSpPr>
+        <p:spPr>
+          <a:xfrm>
+            <a:off x="6827349" y="2148840"/>
+            <a:ext cx="4632844" cy="274320"/>
           </a:xfrm>
           <a:prstGeom prst="rect">
             <a:avLst/>
           </a:prstGeom>
-        </p:spPr>
-      </p:pic>
+          <a:noFill/>
+        </p:spPr>
+        <p:txBody>
+          <a:bodyPr wrap="square" lIns="54864" rIns="54864" tIns="27432" bIns="27432" anchor="t">
+            <a:noAutofit/>
+          </a:bodyPr>
+          <a:lstStyle/>
+          <a:p>
+            <a:pPr algn="l">
+              <a:lnSpc>
+                <a:spcPct val="115000"/>
+              </a:lnSpc>
+            </a:pPr>
+            <a:r>
+              <a:rPr sz="1000" b="1" i="0" spc="250">
+                <a:solidFill>
+                  <a:srgbClr val="26231F"/>
+                </a:solidFill>
+              </a:rPr>
+              <a:t>FIRST BIRTHDAY</a:t>
+            </a:r>
+          </a:p>
+        </p:txBody>
+      </p:sp>
       <p:sp>
         <p:nvSpPr>
           <p:cNvPr id="2" name="Title 1"/>
@@ -3329,8 +3427,8 @@
         </p:nvSpPr>
         <p:spPr>
           <a:xfrm>
-            <a:off x="853418" y="2057400"/>
-            <a:ext cx="6095847" cy="1554480"/>
+            <a:off x="6827349" y="2606040"/>
+            <a:ext cx="4632844" cy="1188720"/>
           </a:xfrm>
         </p:spPr>
         <p:txBody>
@@ -3347,7 +3445,7 @@
             <a:r>
               <a:rPr sz="4000" b="1" i="0">
                 <a:solidFill>
-                  <a:srgbClr val="721D2B"/>
+                  <a:srgbClr val="26231F"/>
                 </a:solidFill>
               </a:rPr>
               <a:t>첫 번째 생일</a:t>
@@ -3357,14 +3455,14 @@
       </p:sp>
       <p:sp>
         <p:nvSpPr>
-          <p:cNvPr id="4" name="한 줄 문구"/>
+          <p:cNvPr id="6" name="한 줄 문구"/>
           <p:cNvSpPr txBox="1"/>
           <p:nvPr/>
         </p:nvSpPr>
         <p:spPr>
           <a:xfrm>
-            <a:off x="853418" y="3749039"/>
-            <a:ext cx="6095847" cy="822960"/>
+            <a:off x="6827349" y="3886200"/>
+            <a:ext cx="4632844" cy="822960"/>
           </a:xfrm>
           <a:prstGeom prst="rect">
             <a:avLst/>
@@ -3383,9 +3481,9 @@
               </a:lnSpc>
             </a:pPr>
             <a:r>
-              <a:rPr sz="1700" b="0" i="1">
-                <a:solidFill>
-                  <a:srgbClr val="721D2B"/>
+              <a:rPr sz="1700" b="0" i="0">
+                <a:solidFill>
+                  <a:srgbClr val="26231F"/>
                 </a:solidFill>
               </a:rPr>
               <a:t>임신 소식을 들은 날부터 기록했습니다</a:t>
@@ -3395,14 +3493,14 @@
       </p:sp>
       <p:sp>
         <p:nvSpPr>
-          <p:cNvPr id="5" name="안내 문구"/>
+          <p:cNvPr id="7" name="안내 문구"/>
           <p:cNvSpPr txBox="1"/>
           <p:nvPr/>
         </p:nvSpPr>
         <p:spPr>
           <a:xfrm>
-            <a:off x="853418" y="4617720"/>
-            <a:ext cx="6095847" cy="914400"/>
+            <a:off x="6827349" y="4754880"/>
+            <a:ext cx="4632844" cy="914400"/>
           </a:xfrm>
           <a:prstGeom prst="rect">
             <a:avLst/>
@@ -3423,10 +3521,10 @@
             <a:r>
               <a:rPr sz="1400" b="0" i="0">
                 <a:solidFill>
-                  <a:srgbClr val="666666"/>
+                  <a:srgbClr val="26231F"/>
                 </a:solidFill>
               </a:rPr>
-              <a:t>아기 이름 · 2027. 00. 00</a:t>
+              <a:t>아기 이름 · 날짜 입력</a:t>
             </a:r>
           </a:p>
           <a:p>
@@ -3438,7 +3536,7 @@
             <a:r>
               <a:rPr sz="1400" b="0" i="0">
                 <a:solidFill>
-                  <a:srgbClr val="666666"/>
+                  <a:srgbClr val="26231F"/>
                 </a:solidFill>
               </a:rPr>
               <a:t>장소를 입력하세요</a:t>
@@ -3460,7 +3558,7 @@
     <p:bg>
       <p:bgPr>
         <a:solidFill>
-          <a:srgbClr val="FCF3F4"/>
+          <a:srgbClr val="FFFFFF"/>
         </a:solidFill>
         <a:effectLst/>
       </p:bgPr>
@@ -3480,46 +3578,84 @@
         </p:nvSpPr>
         <p:spPr>
           <a:xfrm>
-            <a:off x="256032" y="256032"/>
-            <a:ext cx="11679631" cy="6345936"/>
+            <a:off x="10180015" y="-1645920"/>
+            <a:ext cx="3474720" cy="3474720"/>
+          </a:xfrm>
+          <a:prstGeom prst="ellipse">
+            <a:avLst/>
+          </a:prstGeom>
+          <a:solidFill>
+            <a:srgbClr val="F2A6B3"/>
+          </a:solidFill>
+          <a:ln>
+            <a:noFill/>
+          </a:ln>
+        </p:spPr>
+        <p:txBody>
+          <a:bodyPr rtlCol="0" anchor="ctr"/>
+          <a:lstStyle/>
+          <a:p>
+            <a:pPr algn="ctr"/>
+          </a:p>
+        </p:txBody>
+      </p:sp>
+      <p:sp>
+        <p:nvSpPr>
+          <p:cNvPr id="4" name="상단 라벨"/>
+          <p:cNvSpPr txBox="1"/>
+          <p:nvPr/>
+        </p:nvSpPr>
+        <p:spPr>
+          <a:xfrm>
+            <a:off x="640080" y="274320"/>
+            <a:ext cx="5486400" cy="274320"/>
           </a:xfrm>
           <a:prstGeom prst="rect">
             <a:avLst/>
           </a:prstGeom>
           <a:noFill/>
-          <a:ln w="28575">
-            <a:solidFill>
-              <a:srgbClr val="DF3A55"/>
-            </a:solidFill>
-          </a:ln>
-        </p:spPr>
-        <p:txBody>
-          <a:bodyPr rtlCol="0" anchor="ctr"/>
-          <a:lstStyle/>
-          <a:p>
-            <a:pPr algn="ctr"/>
-          </a:p>
-        </p:txBody>
-      </p:sp>
-      <p:sp>
-        <p:nvSpPr>
-          <p:cNvPr id="4" name="장식"/>
+        </p:spPr>
+        <p:txBody>
+          <a:bodyPr wrap="square" lIns="54864" rIns="54864" tIns="27432" bIns="27432" anchor="ctr">
+            <a:noAutofit/>
+          </a:bodyPr>
+          <a:lstStyle/>
+          <a:p>
+            <a:pPr algn="l">
+              <a:lnSpc>
+                <a:spcPct val="115000"/>
+              </a:lnSpc>
+            </a:pPr>
+            <a:r>
+              <a:rPr sz="900" b="1" i="0" spc="250">
+                <a:solidFill>
+                  <a:srgbClr val="26231F"/>
+                </a:solidFill>
+              </a:rPr>
+              <a:t>FIRST BIRTHDAY</a:t>
+            </a:r>
+          </a:p>
+        </p:txBody>
+      </p:sp>
+      <p:sp>
+        <p:nvSpPr>
+          <p:cNvPr id="5" name="포인트"/>
           <p:cNvSpPr/>
           <p:nvPr/>
         </p:nvSpPr>
         <p:spPr>
           <a:xfrm>
-            <a:off x="384048" y="384048"/>
-            <a:ext cx="11423599" cy="6089904"/>
-          </a:xfrm>
-          <a:prstGeom prst="rect">
+            <a:off x="11048695" y="502919"/>
+            <a:ext cx="274320" cy="274320"/>
+          </a:xfrm>
+          <a:prstGeom prst="sun">
             <a:avLst/>
           </a:prstGeom>
-          <a:noFill/>
-          <a:ln w="9525">
-            <a:solidFill>
-              <a:srgbClr val="F7D4DA"/>
-            </a:solidFill>
+          <a:solidFill>
+            <a:srgbClr val="FFFFFF"/>
+          </a:solidFill>
+          <a:ln>
+            <a:noFill/>
           </a:ln>
         </p:spPr>
         <p:txBody>
@@ -3542,8 +3678,8 @@
         </p:nvSpPr>
         <p:spPr>
           <a:xfrm>
-            <a:off x="822960" y="548640"/>
-            <a:ext cx="9265615" cy="822960"/>
+            <a:off x="640080" y="658368"/>
+            <a:ext cx="9082735" cy="868680"/>
           </a:xfrm>
         </p:spPr>
         <p:txBody>
@@ -3560,7 +3696,7 @@
             <a:r>
               <a:rPr sz="3000" b="1" i="0">
                 <a:solidFill>
-                  <a:srgbClr val="721D2B"/>
+                  <a:srgbClr val="26231F"/>
                 </a:solidFill>
               </a:rPr>
               <a:t>우리 아기를 소개합니다</a:t>
@@ -3570,14 +3706,14 @@
       </p:sp>
       <p:sp>
         <p:nvSpPr>
-          <p:cNvPr id="5" name="사진 자리"/>
+          <p:cNvPr id="6" name="사진 자리"/>
           <p:cNvSpPr/>
           <p:nvPr/>
         </p:nvSpPr>
         <p:spPr>
           <a:xfrm>
-            <a:off x="822960" y="1554480"/>
-            <a:ext cx="3840480" cy="4434840"/>
+            <a:off x="640080" y="1783080"/>
+            <a:ext cx="3840480" cy="4389120"/>
           </a:xfrm>
           <a:prstGeom prst="roundRect">
             <a:avLst>
@@ -3585,12 +3721,10 @@
             </a:avLst>
           </a:prstGeom>
           <a:solidFill>
-            <a:srgbClr val="F7D4DA"/>
+            <a:srgbClr val="FAD1D8"/>
           </a:solidFill>
           <a:ln w="19050">
-            <a:solidFill>
-              <a:srgbClr val="DF3A55"/>
-            </a:solidFill>
+            <a:noFill/>
             <a:prstDash val="dash"/>
           </a:ln>
         </p:spPr>
@@ -3608,7 +3742,7 @@
             <a:r>
               <a:rPr sz="1400" b="0" i="0">
                 <a:solidFill>
-                  <a:srgbClr val="721D2B"/>
+                  <a:srgbClr val="8E8780"/>
                 </a:solidFill>
               </a:rPr>
               <a:t>아기 사진을 넣어 주세요</a:t>
@@ -3618,15 +3752,15 @@
       </p:sp>
       <p:graphicFrame>
         <p:nvGraphicFramePr>
-          <p:cNvPr id="6" name="표"/>
+          <p:cNvPr id="7" name="표"/>
           <p:cNvGraphicFramePr>
             <a:graphicFrameLocks noGrp="1"/>
           </p:cNvGraphicFramePr>
           <p:nvPr/>
         </p:nvGraphicFramePr>
         <p:xfrm>
-          <a:off x="5029200" y="1554480"/>
-          <a:ext cx="6339535" cy="3950208"/>
+          <a:off x="4846320" y="1783080"/>
+          <a:ext cx="6705295" cy="3950208"/>
         </p:xfrm>
         <a:graphic>
           <a:graphicData uri="http://schemas.openxmlformats.org/drawingml/2006/table">
@@ -3636,7 +3770,7 @@
               </a:tblPr>
               <a:tblGrid>
                 <a:gridCol w="1828800"/>
-                <a:gridCol w="4510735"/>
+                <a:gridCol w="4876495"/>
               </a:tblGrid>
               <a:tr h="658368">
                 <a:tc>
@@ -3648,7 +3782,7 @@
                       <a:r>
                         <a:rPr sz="1500" b="1">
                           <a:solidFill>
-                            <a:srgbClr val="721D2B"/>
+                            <a:srgbClr val="49272D"/>
                           </a:solidFill>
                         </a:rPr>
                         <a:t>이름</a:t>
@@ -3658,30 +3792,30 @@
                   <a:tcPr anchor="ctr" marL="73152" marR="73152">
                     <a:lnL w="9525" cap="flat" cmpd="sng" algn="ctr">
                       <a:solidFill>
-                        <a:srgbClr val="F7D4DA"/>
+                        <a:srgbClr val="FAD1D8"/>
                       </a:solidFill>
                       <a:prstDash val="solid"/>
                     </a:lnL>
                     <a:lnR w="9525" cap="flat" cmpd="sng" algn="ctr">
                       <a:solidFill>
-                        <a:srgbClr val="F7D4DA"/>
+                        <a:srgbClr val="FAD1D8"/>
                       </a:solidFill>
                       <a:prstDash val="solid"/>
                     </a:lnR>
                     <a:lnT w="9525" cap="flat" cmpd="sng" algn="ctr">
                       <a:solidFill>
-                        <a:srgbClr val="F7D4DA"/>
+                        <a:srgbClr val="FAD1D8"/>
                       </a:solidFill>
                       <a:prstDash val="solid"/>
                     </a:lnT>
                     <a:lnB w="9525" cap="flat" cmpd="sng" algn="ctr">
                       <a:solidFill>
-                        <a:srgbClr val="F7D4DA"/>
+                        <a:srgbClr val="FAD1D8"/>
                       </a:solidFill>
                       <a:prstDash val="solid"/>
                     </a:lnB>
                     <a:solidFill>
-                      <a:srgbClr val="F7D4DA"/>
+                      <a:srgbClr val="FAD1D8"/>
                     </a:solidFill>
                   </a:tcPr>
                 </a:tc>
@@ -3694,7 +3828,7 @@
                       <a:r>
                         <a:rPr sz="1500" b="0">
                           <a:solidFill>
-                            <a:srgbClr val="2B2B2B"/>
+                            <a:srgbClr val="26231F"/>
                           </a:solidFill>
                         </a:rPr>
                         <a:t>입력하세요</a:t>
@@ -3704,30 +3838,30 @@
                   <a:tcPr anchor="ctr" marL="73152" marR="73152">
                     <a:lnL w="9525" cap="flat" cmpd="sng" algn="ctr">
                       <a:solidFill>
-                        <a:srgbClr val="F7D4DA"/>
+                        <a:srgbClr val="FAD1D8"/>
                       </a:solidFill>
                       <a:prstDash val="solid"/>
                     </a:lnL>
                     <a:lnR w="9525" cap="flat" cmpd="sng" algn="ctr">
                       <a:solidFill>
-                        <a:srgbClr val="F7D4DA"/>
+                        <a:srgbClr val="FAD1D8"/>
                       </a:solidFill>
                       <a:prstDash val="solid"/>
                     </a:lnR>
                     <a:lnT w="9525" cap="flat" cmpd="sng" algn="ctr">
                       <a:solidFill>
-                        <a:srgbClr val="F7D4DA"/>
+                        <a:srgbClr val="FAD1D8"/>
                       </a:solidFill>
                       <a:prstDash val="solid"/>
                     </a:lnT>
                     <a:lnB w="9525" cap="flat" cmpd="sng" algn="ctr">
                       <a:solidFill>
-                        <a:srgbClr val="F7D4DA"/>
+                        <a:srgbClr val="FAD1D8"/>
                       </a:solidFill>
                       <a:prstDash val="solid"/>
                     </a:lnB>
                     <a:solidFill>
-                      <a:srgbClr val="FCF3F4"/>
+                      <a:srgbClr val="FDEAED"/>
                     </a:solidFill>
                   </a:tcPr>
                 </a:tc>
@@ -3742,7 +3876,7 @@
                       <a:r>
                         <a:rPr sz="1500" b="1">
                           <a:solidFill>
-                            <a:srgbClr val="721D2B"/>
+                            <a:srgbClr val="49272D"/>
                           </a:solidFill>
                         </a:rPr>
                         <a:t>생일</a:t>
@@ -3752,30 +3886,30 @@
                   <a:tcPr anchor="ctr" marL="73152" marR="73152">
                     <a:lnL w="9525" cap="flat" cmpd="sng" algn="ctr">
                       <a:solidFill>
-                        <a:srgbClr val="F7D4DA"/>
+                        <a:srgbClr val="FAD1D8"/>
                       </a:solidFill>
                       <a:prstDash val="solid"/>
                     </a:lnL>
                     <a:lnR w="9525" cap="flat" cmpd="sng" algn="ctr">
                       <a:solidFill>
-                        <a:srgbClr val="F7D4DA"/>
+                        <a:srgbClr val="FAD1D8"/>
                       </a:solidFill>
                       <a:prstDash val="solid"/>
                     </a:lnR>
                     <a:lnT w="9525" cap="flat" cmpd="sng" algn="ctr">
                       <a:solidFill>
-                        <a:srgbClr val="F7D4DA"/>
+                        <a:srgbClr val="FAD1D8"/>
                       </a:solidFill>
                       <a:prstDash val="solid"/>
                     </a:lnT>
                     <a:lnB w="9525" cap="flat" cmpd="sng" algn="ctr">
                       <a:solidFill>
-                        <a:srgbClr val="F7D4DA"/>
+                        <a:srgbClr val="FAD1D8"/>
                       </a:solidFill>
                       <a:prstDash val="solid"/>
                     </a:lnB>
                     <a:solidFill>
-                      <a:srgbClr val="F7D4DA"/>
+                      <a:srgbClr val="FAD1D8"/>
                     </a:solidFill>
                   </a:tcPr>
                 </a:tc>
@@ -3788,7 +3922,7 @@
                       <a:r>
                         <a:rPr sz="1500" b="0">
                           <a:solidFill>
-                            <a:srgbClr val="2B2B2B"/>
+                            <a:srgbClr val="26231F"/>
                           </a:solidFill>
                         </a:rPr>
                         <a:t>입력하세요</a:t>
@@ -3798,25 +3932,25 @@
                   <a:tcPr anchor="ctr" marL="73152" marR="73152">
                     <a:lnL w="9525" cap="flat" cmpd="sng" algn="ctr">
                       <a:solidFill>
-                        <a:srgbClr val="F7D4DA"/>
+                        <a:srgbClr val="FAD1D8"/>
                       </a:solidFill>
                       <a:prstDash val="solid"/>
                     </a:lnL>
                     <a:lnR w="9525" cap="flat" cmpd="sng" algn="ctr">
                       <a:solidFill>
-                        <a:srgbClr val="F7D4DA"/>
+                        <a:srgbClr val="FAD1D8"/>
                       </a:solidFill>
                       <a:prstDash val="solid"/>
                     </a:lnR>
                     <a:lnT w="9525" cap="flat" cmpd="sng" algn="ctr">
                       <a:solidFill>
-                        <a:srgbClr val="F7D4DA"/>
+                        <a:srgbClr val="FAD1D8"/>
                       </a:solidFill>
                       <a:prstDash val="solid"/>
                     </a:lnT>
                     <a:lnB w="9525" cap="flat" cmpd="sng" algn="ctr">
                       <a:solidFill>
-                        <a:srgbClr val="F7D4DA"/>
+                        <a:srgbClr val="FAD1D8"/>
                       </a:solidFill>
                       <a:prstDash val="solid"/>
                     </a:lnB>
@@ -3836,7 +3970,7 @@
                       <a:r>
                         <a:rPr sz="1500" b="1">
                           <a:solidFill>
-                            <a:srgbClr val="721D2B"/>
+                            <a:srgbClr val="49272D"/>
                           </a:solidFill>
                         </a:rPr>
                         <a:t>키 · 몸무게</a:t>
@@ -3846,30 +3980,30 @@
                   <a:tcPr anchor="ctr" marL="73152" marR="73152">
                     <a:lnL w="9525" cap="flat" cmpd="sng" algn="ctr">
                       <a:solidFill>
-                        <a:srgbClr val="F7D4DA"/>
+                        <a:srgbClr val="FAD1D8"/>
                       </a:solidFill>
                       <a:prstDash val="solid"/>
                     </a:lnL>
                     <a:lnR w="9525" cap="flat" cmpd="sng" algn="ctr">
                       <a:solidFill>
-                        <a:srgbClr val="F7D4DA"/>
+                        <a:srgbClr val="FAD1D8"/>
                       </a:solidFill>
                       <a:prstDash val="solid"/>
                     </a:lnR>
                     <a:lnT w="9525" cap="flat" cmpd="sng" algn="ctr">
                       <a:solidFill>
-                        <a:srgbClr val="F7D4DA"/>
+                        <a:srgbClr val="FAD1D8"/>
                       </a:solidFill>
                       <a:prstDash val="solid"/>
                     </a:lnT>
                     <a:lnB w="9525" cap="flat" cmpd="sng" algn="ctr">
                       <a:solidFill>
-                        <a:srgbClr val="F7D4DA"/>
+                        <a:srgbClr val="FAD1D8"/>
                       </a:solidFill>
                       <a:prstDash val="solid"/>
                     </a:lnB>
                     <a:solidFill>
-                      <a:srgbClr val="F7D4DA"/>
+                      <a:srgbClr val="FAD1D8"/>
                     </a:solidFill>
                   </a:tcPr>
                 </a:tc>
@@ -3882,7 +4016,7 @@
                       <a:r>
                         <a:rPr sz="1500" b="0">
                           <a:solidFill>
-                            <a:srgbClr val="2B2B2B"/>
+                            <a:srgbClr val="26231F"/>
                           </a:solidFill>
                         </a:rPr>
                         <a:t>입력하세요</a:t>
@@ -3892,30 +4026,30 @@
                   <a:tcPr anchor="ctr" marL="73152" marR="73152">
                     <a:lnL w="9525" cap="flat" cmpd="sng" algn="ctr">
                       <a:solidFill>
-                        <a:srgbClr val="F7D4DA"/>
+                        <a:srgbClr val="FAD1D8"/>
                       </a:solidFill>
                       <a:prstDash val="solid"/>
                     </a:lnL>
                     <a:lnR w="9525" cap="flat" cmpd="sng" algn="ctr">
                       <a:solidFill>
-                        <a:srgbClr val="F7D4DA"/>
+                        <a:srgbClr val="FAD1D8"/>
                       </a:solidFill>
                       <a:prstDash val="solid"/>
                     </a:lnR>
                     <a:lnT w="9525" cap="flat" cmpd="sng" algn="ctr">
                       <a:solidFill>
-                        <a:srgbClr val="F7D4DA"/>
+                        <a:srgbClr val="FAD1D8"/>
                       </a:solidFill>
                       <a:prstDash val="solid"/>
                     </a:lnT>
                     <a:lnB w="9525" cap="flat" cmpd="sng" algn="ctr">
                       <a:solidFill>
-                        <a:srgbClr val="F7D4DA"/>
+                        <a:srgbClr val="FAD1D8"/>
                       </a:solidFill>
                       <a:prstDash val="solid"/>
                     </a:lnB>
                     <a:solidFill>
-                      <a:srgbClr val="FCF3F4"/>
+                      <a:srgbClr val="FDEAED"/>
                     </a:solidFill>
                   </a:tcPr>
                 </a:tc>
@@ -3930,7 +4064,7 @@
                       <a:r>
                         <a:rPr sz="1500" b="1">
                           <a:solidFill>
-                            <a:srgbClr val="721D2B"/>
+                            <a:srgbClr val="49272D"/>
                           </a:solidFill>
                         </a:rPr>
                         <a:t>좋아하는 것</a:t>
@@ -3940,30 +4074,30 @@
                   <a:tcPr anchor="ctr" marL="73152" marR="73152">
                     <a:lnL w="9525" cap="flat" cmpd="sng" algn="ctr">
                       <a:solidFill>
-                        <a:srgbClr val="F7D4DA"/>
+                        <a:srgbClr val="FAD1D8"/>
                       </a:solidFill>
                       <a:prstDash val="solid"/>
                     </a:lnL>
                     <a:lnR w="9525" cap="flat" cmpd="sng" algn="ctr">
                       <a:solidFill>
-                        <a:srgbClr val="F7D4DA"/>
+                        <a:srgbClr val="FAD1D8"/>
                       </a:solidFill>
                       <a:prstDash val="solid"/>
                     </a:lnR>
                     <a:lnT w="9525" cap="flat" cmpd="sng" algn="ctr">
                       <a:solidFill>
-                        <a:srgbClr val="F7D4DA"/>
+                        <a:srgbClr val="FAD1D8"/>
                       </a:solidFill>
                       <a:prstDash val="solid"/>
                     </a:lnT>
                     <a:lnB w="9525" cap="flat" cmpd="sng" algn="ctr">
                       <a:solidFill>
-                        <a:srgbClr val="F7D4DA"/>
+                        <a:srgbClr val="FAD1D8"/>
                       </a:solidFill>
                       <a:prstDash val="solid"/>
                     </a:lnB>
                     <a:solidFill>
-                      <a:srgbClr val="F7D4DA"/>
+                      <a:srgbClr val="FAD1D8"/>
                     </a:solidFill>
                   </a:tcPr>
                 </a:tc>
@@ -3976,7 +4110,7 @@
                       <a:r>
                         <a:rPr sz="1500" b="0">
                           <a:solidFill>
-                            <a:srgbClr val="2B2B2B"/>
+                            <a:srgbClr val="26231F"/>
                           </a:solidFill>
                         </a:rPr>
                         <a:t>입력하세요</a:t>
@@ -3986,25 +4120,25 @@
                   <a:tcPr anchor="ctr" marL="73152" marR="73152">
                     <a:lnL w="9525" cap="flat" cmpd="sng" algn="ctr">
                       <a:solidFill>
-                        <a:srgbClr val="F7D4DA"/>
+                        <a:srgbClr val="FAD1D8"/>
                       </a:solidFill>
                       <a:prstDash val="solid"/>
                     </a:lnL>
                     <a:lnR w="9525" cap="flat" cmpd="sng" algn="ctr">
                       <a:solidFill>
-                        <a:srgbClr val="F7D4DA"/>
+                        <a:srgbClr val="FAD1D8"/>
                       </a:solidFill>
                       <a:prstDash val="solid"/>
                     </a:lnR>
                     <a:lnT w="9525" cap="flat" cmpd="sng" algn="ctr">
                       <a:solidFill>
-                        <a:srgbClr val="F7D4DA"/>
+                        <a:srgbClr val="FAD1D8"/>
                       </a:solidFill>
                       <a:prstDash val="solid"/>
                     </a:lnT>
                     <a:lnB w="9525" cap="flat" cmpd="sng" algn="ctr">
                       <a:solidFill>
-                        <a:srgbClr val="F7D4DA"/>
+                        <a:srgbClr val="FAD1D8"/>
                       </a:solidFill>
                       <a:prstDash val="solid"/>
                     </a:lnB>
@@ -4024,7 +4158,7 @@
                       <a:r>
                         <a:rPr sz="1500" b="1">
                           <a:solidFill>
-                            <a:srgbClr val="721D2B"/>
+                            <a:srgbClr val="49272D"/>
                           </a:solidFill>
                         </a:rPr>
                         <a:t>별명</a:t>
@@ -4034,30 +4168,30 @@
                   <a:tcPr anchor="ctr" marL="73152" marR="73152">
                     <a:lnL w="9525" cap="flat" cmpd="sng" algn="ctr">
                       <a:solidFill>
-                        <a:srgbClr val="F7D4DA"/>
+                        <a:srgbClr val="FAD1D8"/>
                       </a:solidFill>
                       <a:prstDash val="solid"/>
                     </a:lnL>
                     <a:lnR w="9525" cap="flat" cmpd="sng" algn="ctr">
                       <a:solidFill>
-                        <a:srgbClr val="F7D4DA"/>
+                        <a:srgbClr val="FAD1D8"/>
                       </a:solidFill>
                       <a:prstDash val="solid"/>
                     </a:lnR>
                     <a:lnT w="9525" cap="flat" cmpd="sng" algn="ctr">
                       <a:solidFill>
-                        <a:srgbClr val="F7D4DA"/>
+                        <a:srgbClr val="FAD1D8"/>
                       </a:solidFill>
                       <a:prstDash val="solid"/>
                     </a:lnT>
                     <a:lnB w="9525" cap="flat" cmpd="sng" algn="ctr">
                       <a:solidFill>
-                        <a:srgbClr val="F7D4DA"/>
+                        <a:srgbClr val="FAD1D8"/>
                       </a:solidFill>
                       <a:prstDash val="solid"/>
                     </a:lnB>
                     <a:solidFill>
-                      <a:srgbClr val="F7D4DA"/>
+                      <a:srgbClr val="FAD1D8"/>
                     </a:solidFill>
                   </a:tcPr>
                 </a:tc>
@@ -4070,7 +4204,7 @@
                       <a:r>
                         <a:rPr sz="1500" b="0">
                           <a:solidFill>
-                            <a:srgbClr val="2B2B2B"/>
+                            <a:srgbClr val="26231F"/>
                           </a:solidFill>
                         </a:rPr>
                         <a:t>입력하세요</a:t>
@@ -4080,30 +4214,30 @@
                   <a:tcPr anchor="ctr" marL="73152" marR="73152">
                     <a:lnL w="9525" cap="flat" cmpd="sng" algn="ctr">
                       <a:solidFill>
-                        <a:srgbClr val="F7D4DA"/>
+                        <a:srgbClr val="FAD1D8"/>
                       </a:solidFill>
                       <a:prstDash val="solid"/>
                     </a:lnL>
                     <a:lnR w="9525" cap="flat" cmpd="sng" algn="ctr">
                       <a:solidFill>
-                        <a:srgbClr val="F7D4DA"/>
+                        <a:srgbClr val="FAD1D8"/>
                       </a:solidFill>
                       <a:prstDash val="solid"/>
                     </a:lnR>
                     <a:lnT w="9525" cap="flat" cmpd="sng" algn="ctr">
                       <a:solidFill>
-                        <a:srgbClr val="F7D4DA"/>
+                        <a:srgbClr val="FAD1D8"/>
                       </a:solidFill>
                       <a:prstDash val="solid"/>
                     </a:lnT>
                     <a:lnB w="9525" cap="flat" cmpd="sng" algn="ctr">
                       <a:solidFill>
-                        <a:srgbClr val="F7D4DA"/>
+                        <a:srgbClr val="FAD1D8"/>
                       </a:solidFill>
                       <a:prstDash val="solid"/>
                     </a:lnB>
                     <a:solidFill>
-                      <a:srgbClr val="FCF3F4"/>
+                      <a:srgbClr val="FDEAED"/>
                     </a:solidFill>
                   </a:tcPr>
                 </a:tc>
@@ -4118,7 +4252,7 @@
                       <a:r>
                         <a:rPr sz="1500" b="1">
                           <a:solidFill>
-                            <a:srgbClr val="721D2B"/>
+                            <a:srgbClr val="49272D"/>
                           </a:solidFill>
                         </a:rPr>
                         <a:t>부모의 마음</a:t>
@@ -4128,30 +4262,30 @@
                   <a:tcPr anchor="ctr" marL="73152" marR="73152">
                     <a:lnL w="9525" cap="flat" cmpd="sng" algn="ctr">
                       <a:solidFill>
-                        <a:srgbClr val="F7D4DA"/>
+                        <a:srgbClr val="FAD1D8"/>
                       </a:solidFill>
                       <a:prstDash val="solid"/>
                     </a:lnL>
                     <a:lnR w="9525" cap="flat" cmpd="sng" algn="ctr">
                       <a:solidFill>
-                        <a:srgbClr val="F7D4DA"/>
+                        <a:srgbClr val="FAD1D8"/>
                       </a:solidFill>
                       <a:prstDash val="solid"/>
                     </a:lnR>
                     <a:lnT w="9525" cap="flat" cmpd="sng" algn="ctr">
                       <a:solidFill>
-                        <a:srgbClr val="F7D4DA"/>
+                        <a:srgbClr val="FAD1D8"/>
                       </a:solidFill>
                       <a:prstDash val="solid"/>
                     </a:lnT>
                     <a:lnB w="9525" cap="flat" cmpd="sng" algn="ctr">
                       <a:solidFill>
-                        <a:srgbClr val="F7D4DA"/>
+                        <a:srgbClr val="FAD1D8"/>
                       </a:solidFill>
                       <a:prstDash val="solid"/>
                     </a:lnB>
                     <a:solidFill>
-                      <a:srgbClr val="F7D4DA"/>
+                      <a:srgbClr val="FAD1D8"/>
                     </a:solidFill>
                   </a:tcPr>
                 </a:tc>
@@ -4164,7 +4298,7 @@
                       <a:r>
                         <a:rPr sz="1500" b="0">
                           <a:solidFill>
-                            <a:srgbClr val="2B2B2B"/>
+                            <a:srgbClr val="26231F"/>
                           </a:solidFill>
                         </a:rPr>
                         <a:t>입력하세요</a:t>
@@ -4174,25 +4308,25 @@
                   <a:tcPr anchor="ctr" marL="73152" marR="73152">
                     <a:lnL w="9525" cap="flat" cmpd="sng" algn="ctr">
                       <a:solidFill>
-                        <a:srgbClr val="F7D4DA"/>
+                        <a:srgbClr val="FAD1D8"/>
                       </a:solidFill>
                       <a:prstDash val="solid"/>
                     </a:lnL>
                     <a:lnR w="9525" cap="flat" cmpd="sng" algn="ctr">
                       <a:solidFill>
-                        <a:srgbClr val="F7D4DA"/>
+                        <a:srgbClr val="FAD1D8"/>
                       </a:solidFill>
                       <a:prstDash val="solid"/>
                     </a:lnR>
                     <a:lnT w="9525" cap="flat" cmpd="sng" algn="ctr">
                       <a:solidFill>
-                        <a:srgbClr val="F7D4DA"/>
+                        <a:srgbClr val="FAD1D8"/>
                       </a:solidFill>
                       <a:prstDash val="solid"/>
                     </a:lnT>
                     <a:lnB w="9525" cap="flat" cmpd="sng" algn="ctr">
                       <a:solidFill>
-                        <a:srgbClr val="F7D4DA"/>
+                        <a:srgbClr val="FAD1D8"/>
                       </a:solidFill>
                       <a:prstDash val="solid"/>
                     </a:lnB>
@@ -4220,7 +4354,7 @@
     <p:bg>
       <p:bgPr>
         <a:solidFill>
-          <a:srgbClr val="FCF3F4"/>
+          <a:srgbClr val="FFFFFF"/>
         </a:solidFill>
         <a:effectLst/>
       </p:bgPr>
@@ -4240,46 +4374,84 @@
         </p:nvSpPr>
         <p:spPr>
           <a:xfrm>
-            <a:off x="256032" y="256032"/>
-            <a:ext cx="11679631" cy="6345936"/>
+            <a:off x="10180015" y="-1645920"/>
+            <a:ext cx="3474720" cy="3474720"/>
+          </a:xfrm>
+          <a:prstGeom prst="ellipse">
+            <a:avLst/>
+          </a:prstGeom>
+          <a:solidFill>
+            <a:srgbClr val="F2A6B3"/>
+          </a:solidFill>
+          <a:ln>
+            <a:noFill/>
+          </a:ln>
+        </p:spPr>
+        <p:txBody>
+          <a:bodyPr rtlCol="0" anchor="ctr"/>
+          <a:lstStyle/>
+          <a:p>
+            <a:pPr algn="ctr"/>
+          </a:p>
+        </p:txBody>
+      </p:sp>
+      <p:sp>
+        <p:nvSpPr>
+          <p:cNvPr id="4" name="상단 라벨"/>
+          <p:cNvSpPr txBox="1"/>
+          <p:nvPr/>
+        </p:nvSpPr>
+        <p:spPr>
+          <a:xfrm>
+            <a:off x="640080" y="274320"/>
+            <a:ext cx="5486400" cy="274320"/>
           </a:xfrm>
           <a:prstGeom prst="rect">
             <a:avLst/>
           </a:prstGeom>
           <a:noFill/>
-          <a:ln w="28575">
-            <a:solidFill>
-              <a:srgbClr val="DF3A55"/>
-            </a:solidFill>
-          </a:ln>
-        </p:spPr>
-        <p:txBody>
-          <a:bodyPr rtlCol="0" anchor="ctr"/>
-          <a:lstStyle/>
-          <a:p>
-            <a:pPr algn="ctr"/>
-          </a:p>
-        </p:txBody>
-      </p:sp>
-      <p:sp>
-        <p:nvSpPr>
-          <p:cNvPr id="4" name="장식"/>
+        </p:spPr>
+        <p:txBody>
+          <a:bodyPr wrap="square" lIns="54864" rIns="54864" tIns="27432" bIns="27432" anchor="ctr">
+            <a:noAutofit/>
+          </a:bodyPr>
+          <a:lstStyle/>
+          <a:p>
+            <a:pPr algn="l">
+              <a:lnSpc>
+                <a:spcPct val="115000"/>
+              </a:lnSpc>
+            </a:pPr>
+            <a:r>
+              <a:rPr sz="900" b="1" i="0" spc="250">
+                <a:solidFill>
+                  <a:srgbClr val="26231F"/>
+                </a:solidFill>
+              </a:rPr>
+              <a:t>FIRST BIRTHDAY</a:t>
+            </a:r>
+          </a:p>
+        </p:txBody>
+      </p:sp>
+      <p:sp>
+        <p:nvSpPr>
+          <p:cNvPr id="5" name="포인트"/>
           <p:cNvSpPr/>
           <p:nvPr/>
         </p:nvSpPr>
         <p:spPr>
           <a:xfrm>
-            <a:off x="384048" y="384048"/>
-            <a:ext cx="11423599" cy="6089904"/>
-          </a:xfrm>
-          <a:prstGeom prst="rect">
+            <a:off x="11048695" y="502919"/>
+            <a:ext cx="274320" cy="274320"/>
+          </a:xfrm>
+          <a:prstGeom prst="sun">
             <a:avLst/>
           </a:prstGeom>
-          <a:noFill/>
-          <a:ln w="9525">
-            <a:solidFill>
-              <a:srgbClr val="F7D4DA"/>
-            </a:solidFill>
+          <a:solidFill>
+            <a:srgbClr val="FFFFFF"/>
+          </a:solidFill>
+          <a:ln>
+            <a:noFill/>
           </a:ln>
         </p:spPr>
         <p:txBody>
@@ -4302,8 +4474,8 @@
         </p:nvSpPr>
         <p:spPr>
           <a:xfrm>
-            <a:off x="822960" y="548640"/>
-            <a:ext cx="9265615" cy="822960"/>
+            <a:off x="640080" y="658368"/>
+            <a:ext cx="9082735" cy="868680"/>
           </a:xfrm>
         </p:spPr>
         <p:txBody>
@@ -4320,7 +4492,7 @@
             <a:r>
               <a:rPr sz="3000" b="1" i="0">
                 <a:solidFill>
-                  <a:srgbClr val="721D2B"/>
+                  <a:srgbClr val="26231F"/>
                 </a:solidFill>
               </a:rPr>
               <a:t>태어난 날 이야기</a:t>
@@ -4330,20 +4502,20 @@
       </p:sp>
       <p:sp>
         <p:nvSpPr>
-          <p:cNvPr id="5" name="타임라인 선"/>
+          <p:cNvPr id="6" name="타임라인 선"/>
           <p:cNvSpPr/>
           <p:nvPr/>
         </p:nvSpPr>
         <p:spPr>
           <a:xfrm>
-            <a:off x="822960" y="3291840"/>
-            <a:ext cx="10545775" cy="54864"/>
+            <a:off x="640080" y="3520440"/>
+            <a:ext cx="10911535" cy="54864"/>
           </a:xfrm>
           <a:prstGeom prst="rect">
             <a:avLst/>
           </a:prstGeom>
           <a:solidFill>
-            <a:srgbClr val="F7D4DA"/>
+            <a:srgbClr val="FAD1D8"/>
           </a:solidFill>
           <a:ln>
             <a:noFill/>
@@ -4359,20 +4531,20 @@
       </p:sp>
       <p:sp>
         <p:nvSpPr>
-          <p:cNvPr id="6" name="때 1"/>
+          <p:cNvPr id="7" name="때 1"/>
           <p:cNvSpPr/>
           <p:nvPr/>
         </p:nvSpPr>
         <p:spPr>
           <a:xfrm>
-            <a:off x="1940013" y="3108960"/>
+            <a:off x="1802853" y="3337560"/>
             <a:ext cx="402336" cy="402336"/>
           </a:xfrm>
           <a:prstGeom prst="ellipse">
             <a:avLst/>
           </a:prstGeom>
           <a:solidFill>
-            <a:srgbClr val="DF3A55"/>
+            <a:srgbClr val="ED97A5"/>
           </a:solidFill>
           <a:ln w="38100">
             <a:solidFill>
@@ -4390,14 +4562,14 @@
       </p:sp>
       <p:sp>
         <p:nvSpPr>
-          <p:cNvPr id="7" name="TextBox 6"/>
+          <p:cNvPr id="8" name="TextBox 7"/>
           <p:cNvSpPr txBox="1"/>
           <p:nvPr/>
         </p:nvSpPr>
         <p:spPr>
           <a:xfrm>
-            <a:off x="868680" y="2468880"/>
-            <a:ext cx="2545003" cy="457200"/>
+            <a:off x="685800" y="2697480"/>
+            <a:ext cx="2636443" cy="457200"/>
           </a:xfrm>
           <a:prstGeom prst="rect">
             <a:avLst/>
@@ -4418,7 +4590,7 @@
             <a:r>
               <a:rPr sz="1600" b="1" i="0">
                 <a:solidFill>
-                  <a:srgbClr val="DF3A55"/>
+                  <a:srgbClr val="ED97A5"/>
                 </a:solidFill>
               </a:rPr>
               <a:t>임신</a:t>
@@ -4428,14 +4600,14 @@
       </p:sp>
       <p:sp>
         <p:nvSpPr>
-          <p:cNvPr id="8" name="TextBox 7"/>
+          <p:cNvPr id="9" name="TextBox 8"/>
           <p:cNvSpPr txBox="1"/>
           <p:nvPr/>
         </p:nvSpPr>
         <p:spPr>
           <a:xfrm>
-            <a:off x="914400" y="3657600"/>
-            <a:ext cx="2453563" cy="457200"/>
+            <a:off x="731519" y="3886200"/>
+            <a:ext cx="2545003" cy="457200"/>
           </a:xfrm>
           <a:prstGeom prst="rect">
             <a:avLst/>
@@ -4456,7 +4628,7 @@
             <a:r>
               <a:rPr sz="1800" b="1" i="0">
                 <a:solidFill>
-                  <a:srgbClr val="721D2B"/>
+                  <a:srgbClr val="49272D"/>
                 </a:solidFill>
               </a:rPr>
               <a:t>소식을 들은 날</a:t>
@@ -4466,14 +4638,14 @@
       </p:sp>
       <p:sp>
         <p:nvSpPr>
-          <p:cNvPr id="9" name="TextBox 8"/>
+          <p:cNvPr id="10" name="TextBox 9"/>
           <p:cNvSpPr txBox="1"/>
           <p:nvPr/>
         </p:nvSpPr>
         <p:spPr>
           <a:xfrm>
-            <a:off x="914400" y="4160520"/>
-            <a:ext cx="2453563" cy="1645920"/>
+            <a:off x="731519" y="4389120"/>
+            <a:ext cx="2545003" cy="1645920"/>
           </a:xfrm>
           <a:prstGeom prst="rect">
             <a:avLst/>
@@ -4494,7 +4666,7 @@
             <a:r>
               <a:rPr sz="1500" b="0" i="0">
                 <a:solidFill>
-                  <a:srgbClr val="2B2B2B"/>
+                  <a:srgbClr val="26231F"/>
                 </a:solidFill>
               </a:rPr>
               <a:t>기억을 적어 주세요</a:t>
@@ -4504,20 +4676,20 @@
       </p:sp>
       <p:sp>
         <p:nvSpPr>
-          <p:cNvPr id="10" name="때 2"/>
+          <p:cNvPr id="11" name="때 2"/>
           <p:cNvSpPr/>
           <p:nvPr/>
         </p:nvSpPr>
         <p:spPr>
           <a:xfrm>
-            <a:off x="4576457" y="3108960"/>
+            <a:off x="4530737" y="3337560"/>
             <a:ext cx="402336" cy="402336"/>
           </a:xfrm>
           <a:prstGeom prst="ellipse">
             <a:avLst/>
           </a:prstGeom>
           <a:solidFill>
-            <a:srgbClr val="DF3A55"/>
+            <a:srgbClr val="ED97A5"/>
           </a:solidFill>
           <a:ln w="38100">
             <a:solidFill>
@@ -4535,14 +4707,14 @@
       </p:sp>
       <p:sp>
         <p:nvSpPr>
-          <p:cNvPr id="11" name="TextBox 10"/>
+          <p:cNvPr id="12" name="TextBox 11"/>
           <p:cNvSpPr txBox="1"/>
           <p:nvPr/>
         </p:nvSpPr>
         <p:spPr>
           <a:xfrm>
-            <a:off x="3505123" y="2468880"/>
-            <a:ext cx="2545003" cy="457200"/>
+            <a:off x="3413683" y="2697480"/>
+            <a:ext cx="2636443" cy="457200"/>
           </a:xfrm>
           <a:prstGeom prst="rect">
             <a:avLst/>
@@ -4563,7 +4735,7 @@
             <a:r>
               <a:rPr sz="1600" b="1" i="0">
                 <a:solidFill>
-                  <a:srgbClr val="DF3A55"/>
+                  <a:srgbClr val="ED97A5"/>
                 </a:solidFill>
               </a:rPr>
               <a:t>출산</a:t>
@@ -4573,14 +4745,14 @@
       </p:sp>
       <p:sp>
         <p:nvSpPr>
-          <p:cNvPr id="12" name="TextBox 11"/>
+          <p:cNvPr id="13" name="TextBox 12"/>
           <p:cNvSpPr txBox="1"/>
           <p:nvPr/>
         </p:nvSpPr>
         <p:spPr>
           <a:xfrm>
-            <a:off x="3550843" y="3657600"/>
-            <a:ext cx="2453563" cy="457200"/>
+            <a:off x="3459403" y="3886200"/>
+            <a:ext cx="2545003" cy="457200"/>
           </a:xfrm>
           <a:prstGeom prst="rect">
             <a:avLst/>
@@ -4601,7 +4773,7 @@
             <a:r>
               <a:rPr sz="1800" b="1" i="0">
                 <a:solidFill>
-                  <a:srgbClr val="721D2B"/>
+                  <a:srgbClr val="49272D"/>
                 </a:solidFill>
               </a:rPr>
               <a:t>태어난 날</a:t>
@@ -4611,14 +4783,14 @@
       </p:sp>
       <p:sp>
         <p:nvSpPr>
-          <p:cNvPr id="13" name="TextBox 12"/>
+          <p:cNvPr id="14" name="TextBox 13"/>
           <p:cNvSpPr txBox="1"/>
           <p:nvPr/>
         </p:nvSpPr>
         <p:spPr>
           <a:xfrm>
-            <a:off x="3550843" y="4160520"/>
-            <a:ext cx="2453563" cy="1645920"/>
+            <a:off x="3459403" y="4389120"/>
+            <a:ext cx="2545003" cy="1645920"/>
           </a:xfrm>
           <a:prstGeom prst="rect">
             <a:avLst/>
@@ -4639,7 +4811,7 @@
             <a:r>
               <a:rPr sz="1500" b="0" i="0">
                 <a:solidFill>
-                  <a:srgbClr val="2B2B2B"/>
+                  <a:srgbClr val="26231F"/>
                 </a:solidFill>
               </a:rPr>
               <a:t>기억을 적어 주세요</a:t>
@@ -4649,20 +4821,20 @@
       </p:sp>
       <p:sp>
         <p:nvSpPr>
-          <p:cNvPr id="14" name="때 3"/>
+          <p:cNvPr id="15" name="때 3"/>
           <p:cNvSpPr/>
           <p:nvPr/>
         </p:nvSpPr>
         <p:spPr>
           <a:xfrm>
-            <a:off x="7212901" y="3108960"/>
+            <a:off x="7258621" y="3337560"/>
             <a:ext cx="402336" cy="402336"/>
           </a:xfrm>
           <a:prstGeom prst="ellipse">
             <a:avLst/>
           </a:prstGeom>
           <a:solidFill>
-            <a:srgbClr val="DF3A55"/>
+            <a:srgbClr val="ED97A5"/>
           </a:solidFill>
           <a:ln w="38100">
             <a:solidFill>
@@ -4680,14 +4852,14 @@
       </p:sp>
       <p:sp>
         <p:nvSpPr>
-          <p:cNvPr id="15" name="TextBox 14"/>
+          <p:cNvPr id="16" name="TextBox 15"/>
           <p:cNvSpPr txBox="1"/>
           <p:nvPr/>
         </p:nvSpPr>
         <p:spPr>
           <a:xfrm>
-            <a:off x="6141567" y="2468880"/>
-            <a:ext cx="2545003" cy="457200"/>
+            <a:off x="6141567" y="2697480"/>
+            <a:ext cx="2636443" cy="457200"/>
           </a:xfrm>
           <a:prstGeom prst="rect">
             <a:avLst/>
@@ -4708,7 +4880,7 @@
             <a:r>
               <a:rPr sz="1600" b="1" i="0">
                 <a:solidFill>
-                  <a:srgbClr val="DF3A55"/>
+                  <a:srgbClr val="ED97A5"/>
                 </a:solidFill>
               </a:rPr>
               <a:t>첫 만남</a:t>
@@ -4718,14 +4890,14 @@
       </p:sp>
       <p:sp>
         <p:nvSpPr>
-          <p:cNvPr id="16" name="TextBox 15"/>
+          <p:cNvPr id="17" name="TextBox 16"/>
           <p:cNvSpPr txBox="1"/>
           <p:nvPr/>
         </p:nvSpPr>
         <p:spPr>
           <a:xfrm>
-            <a:off x="6187287" y="3657600"/>
-            <a:ext cx="2453563" cy="457200"/>
+            <a:off x="6187287" y="3886200"/>
+            <a:ext cx="2545003" cy="457200"/>
           </a:xfrm>
           <a:prstGeom prst="rect">
             <a:avLst/>
@@ -4746,7 +4918,7 @@
             <a:r>
               <a:rPr sz="1800" b="1" i="0">
                 <a:solidFill>
-                  <a:srgbClr val="721D2B"/>
+                  <a:srgbClr val="49272D"/>
                 </a:solidFill>
               </a:rPr>
               <a:t>품에 안은 순간</a:t>
@@ -4756,14 +4928,14 @@
       </p:sp>
       <p:sp>
         <p:nvSpPr>
-          <p:cNvPr id="17" name="TextBox 16"/>
+          <p:cNvPr id="18" name="TextBox 17"/>
           <p:cNvSpPr txBox="1"/>
           <p:nvPr/>
         </p:nvSpPr>
         <p:spPr>
           <a:xfrm>
-            <a:off x="6187287" y="4160520"/>
-            <a:ext cx="2453563" cy="1645920"/>
+            <a:off x="6187287" y="4389120"/>
+            <a:ext cx="2545003" cy="1645920"/>
           </a:xfrm>
           <a:prstGeom prst="rect">
             <a:avLst/>
@@ -4784,7 +4956,7 @@
             <a:r>
               <a:rPr sz="1500" b="0" i="0">
                 <a:solidFill>
-                  <a:srgbClr val="2B2B2B"/>
+                  <a:srgbClr val="26231F"/>
                 </a:solidFill>
               </a:rPr>
               <a:t>기억을 적어 주세요</a:t>
@@ -4794,20 +4966,20 @@
       </p:sp>
       <p:sp>
         <p:nvSpPr>
-          <p:cNvPr id="18" name="때 4"/>
+          <p:cNvPr id="19" name="때 4"/>
           <p:cNvSpPr/>
           <p:nvPr/>
         </p:nvSpPr>
         <p:spPr>
           <a:xfrm>
-            <a:off x="9849345" y="3108960"/>
+            <a:off x="9986505" y="3337560"/>
             <a:ext cx="402336" cy="402336"/>
           </a:xfrm>
           <a:prstGeom prst="ellipse">
             <a:avLst/>
           </a:prstGeom>
           <a:solidFill>
-            <a:srgbClr val="DF3A55"/>
+            <a:srgbClr val="ED97A5"/>
           </a:solidFill>
           <a:ln w="38100">
             <a:solidFill>
@@ -4825,14 +4997,14 @@
       </p:sp>
       <p:sp>
         <p:nvSpPr>
-          <p:cNvPr id="19" name="TextBox 18"/>
+          <p:cNvPr id="20" name="TextBox 19"/>
           <p:cNvSpPr txBox="1"/>
           <p:nvPr/>
         </p:nvSpPr>
         <p:spPr>
           <a:xfrm>
-            <a:off x="8778011" y="2468880"/>
-            <a:ext cx="2545003" cy="457200"/>
+            <a:off x="8869451" y="2697480"/>
+            <a:ext cx="2636443" cy="457200"/>
           </a:xfrm>
           <a:prstGeom prst="rect">
             <a:avLst/>
@@ -4853,7 +5025,7 @@
             <a:r>
               <a:rPr sz="1600" b="1" i="0">
                 <a:solidFill>
-                  <a:srgbClr val="DF3A55"/>
+                  <a:srgbClr val="ED97A5"/>
                 </a:solidFill>
               </a:rPr>
               <a:t>집으로</a:t>
@@ -4863,14 +5035,14 @@
       </p:sp>
       <p:sp>
         <p:nvSpPr>
-          <p:cNvPr id="20" name="TextBox 19"/>
+          <p:cNvPr id="21" name="TextBox 20"/>
           <p:cNvSpPr txBox="1"/>
           <p:nvPr/>
         </p:nvSpPr>
         <p:spPr>
           <a:xfrm>
-            <a:off x="8823731" y="3657600"/>
-            <a:ext cx="2453563" cy="457200"/>
+            <a:off x="8915171" y="3886200"/>
+            <a:ext cx="2545003" cy="457200"/>
           </a:xfrm>
           <a:prstGeom prst="rect">
             <a:avLst/>
@@ -4891,7 +5063,7 @@
             <a:r>
               <a:rPr sz="1800" b="1" i="0">
                 <a:solidFill>
-                  <a:srgbClr val="721D2B"/>
+                  <a:srgbClr val="49272D"/>
                 </a:solidFill>
               </a:rPr>
               <a:t>함께 돌아온 날</a:t>
@@ -4901,14 +5073,14 @@
       </p:sp>
       <p:sp>
         <p:nvSpPr>
-          <p:cNvPr id="21" name="TextBox 20"/>
+          <p:cNvPr id="22" name="TextBox 21"/>
           <p:cNvSpPr txBox="1"/>
           <p:nvPr/>
         </p:nvSpPr>
         <p:spPr>
           <a:xfrm>
-            <a:off x="8823731" y="4160520"/>
-            <a:ext cx="2453563" cy="1645920"/>
+            <a:off x="8915171" y="4389120"/>
+            <a:ext cx="2545003" cy="1645920"/>
           </a:xfrm>
           <a:prstGeom prst="rect">
             <a:avLst/>
@@ -4929,7 +5101,7 @@
             <a:r>
               <a:rPr sz="1500" b="0" i="0">
                 <a:solidFill>
-                  <a:srgbClr val="2B2B2B"/>
+                  <a:srgbClr val="26231F"/>
                 </a:solidFill>
               </a:rPr>
               <a:t>기억을 적어 주세요</a:t>
@@ -4951,7 +5123,7 @@
     <p:bg>
       <p:bgPr>
         <a:solidFill>
-          <a:srgbClr val="FCF3F4"/>
+          <a:srgbClr val="FFFFFF"/>
         </a:solidFill>
         <a:effectLst/>
       </p:bgPr>
@@ -4971,46 +5143,84 @@
         </p:nvSpPr>
         <p:spPr>
           <a:xfrm>
-            <a:off x="256032" y="256032"/>
-            <a:ext cx="11679631" cy="6345936"/>
+            <a:off x="10180015" y="-1645920"/>
+            <a:ext cx="3474720" cy="3474720"/>
+          </a:xfrm>
+          <a:prstGeom prst="ellipse">
+            <a:avLst/>
+          </a:prstGeom>
+          <a:solidFill>
+            <a:srgbClr val="F2A6B3"/>
+          </a:solidFill>
+          <a:ln>
+            <a:noFill/>
+          </a:ln>
+        </p:spPr>
+        <p:txBody>
+          <a:bodyPr rtlCol="0" anchor="ctr"/>
+          <a:lstStyle/>
+          <a:p>
+            <a:pPr algn="ctr"/>
+          </a:p>
+        </p:txBody>
+      </p:sp>
+      <p:sp>
+        <p:nvSpPr>
+          <p:cNvPr id="4" name="상단 라벨"/>
+          <p:cNvSpPr txBox="1"/>
+          <p:nvPr/>
+        </p:nvSpPr>
+        <p:spPr>
+          <a:xfrm>
+            <a:off x="640080" y="274320"/>
+            <a:ext cx="5486400" cy="274320"/>
           </a:xfrm>
           <a:prstGeom prst="rect">
             <a:avLst/>
           </a:prstGeom>
           <a:noFill/>
-          <a:ln w="28575">
-            <a:solidFill>
-              <a:srgbClr val="DF3A55"/>
-            </a:solidFill>
-          </a:ln>
-        </p:spPr>
-        <p:txBody>
-          <a:bodyPr rtlCol="0" anchor="ctr"/>
-          <a:lstStyle/>
-          <a:p>
-            <a:pPr algn="ctr"/>
-          </a:p>
-        </p:txBody>
-      </p:sp>
-      <p:sp>
-        <p:nvSpPr>
-          <p:cNvPr id="4" name="장식"/>
+        </p:spPr>
+        <p:txBody>
+          <a:bodyPr wrap="square" lIns="54864" rIns="54864" tIns="27432" bIns="27432" anchor="ctr">
+            <a:noAutofit/>
+          </a:bodyPr>
+          <a:lstStyle/>
+          <a:p>
+            <a:pPr algn="l">
+              <a:lnSpc>
+                <a:spcPct val="115000"/>
+              </a:lnSpc>
+            </a:pPr>
+            <a:r>
+              <a:rPr sz="900" b="1" i="0" spc="250">
+                <a:solidFill>
+                  <a:srgbClr val="26231F"/>
+                </a:solidFill>
+              </a:rPr>
+              <a:t>FIRST BIRTHDAY</a:t>
+            </a:r>
+          </a:p>
+        </p:txBody>
+      </p:sp>
+      <p:sp>
+        <p:nvSpPr>
+          <p:cNvPr id="5" name="포인트"/>
           <p:cNvSpPr/>
           <p:nvPr/>
         </p:nvSpPr>
         <p:spPr>
           <a:xfrm>
-            <a:off x="384048" y="384048"/>
-            <a:ext cx="11423599" cy="6089904"/>
-          </a:xfrm>
-          <a:prstGeom prst="rect">
+            <a:off x="11048695" y="502919"/>
+            <a:ext cx="274320" cy="274320"/>
+          </a:xfrm>
+          <a:prstGeom prst="sun">
             <a:avLst/>
           </a:prstGeom>
-          <a:noFill/>
-          <a:ln w="9525">
-            <a:solidFill>
-              <a:srgbClr val="F7D4DA"/>
-            </a:solidFill>
+          <a:solidFill>
+            <a:srgbClr val="FFFFFF"/>
+          </a:solidFill>
+          <a:ln>
+            <a:noFill/>
           </a:ln>
         </p:spPr>
         <p:txBody>
@@ -5033,8 +5243,8 @@
         </p:nvSpPr>
         <p:spPr>
           <a:xfrm>
-            <a:off x="822960" y="548640"/>
-            <a:ext cx="9265615" cy="822960"/>
+            <a:off x="640080" y="658368"/>
+            <a:ext cx="9082735" cy="868680"/>
           </a:xfrm>
         </p:spPr>
         <p:txBody>
@@ -5051,7 +5261,7 @@
             <a:r>
               <a:rPr sz="3000" b="1" i="0">
                 <a:solidFill>
-                  <a:srgbClr val="721D2B"/>
+                  <a:srgbClr val="26231F"/>
                 </a:solidFill>
               </a:rPr>
               <a:t>첫 번째 순간들</a:t>
@@ -5061,26 +5271,26 @@
       </p:sp>
       <p:sp>
         <p:nvSpPr>
-          <p:cNvPr id="5" name="카드 1"/>
+          <p:cNvPr id="6" name="카드 1"/>
           <p:cNvSpPr/>
           <p:nvPr/>
         </p:nvSpPr>
         <p:spPr>
           <a:xfrm>
-            <a:off x="822960" y="1554480"/>
-            <a:ext cx="2464993" cy="4617720"/>
+            <a:off x="640080" y="1783080"/>
+            <a:ext cx="2556433" cy="4572000"/>
           </a:xfrm>
           <a:prstGeom prst="roundRect">
             <a:avLst>
-              <a:gd name="adj" fmla="val 8000"/>
+              <a:gd name="adj" fmla="val 3000"/>
             </a:avLst>
           </a:prstGeom>
           <a:solidFill>
-            <a:srgbClr val="FCF3F4"/>
+            <a:srgbClr val="FFFFFF"/>
           </a:solidFill>
-          <a:ln w="15875">
+          <a:ln w="9525">
             <a:solidFill>
-              <a:srgbClr val="F7D4DA"/>
+              <a:srgbClr val="FAD1D8"/>
             </a:solidFill>
           </a:ln>
         </p:spPr>
@@ -5094,20 +5304,49 @@
       </p:sp>
       <p:sp>
         <p:nvSpPr>
-          <p:cNvPr id="6" name="번호 1"/>
+          <p:cNvPr id="7" name="위쪽 띠"/>
           <p:cNvSpPr/>
           <p:nvPr/>
         </p:nvSpPr>
         <p:spPr>
           <a:xfrm>
-            <a:off x="1005840" y="1737360"/>
+            <a:off x="649224" y="1792224"/>
+            <a:ext cx="2538145" cy="82296"/>
+          </a:xfrm>
+          <a:prstGeom prst="rect">
+            <a:avLst/>
+          </a:prstGeom>
+          <a:solidFill>
+            <a:srgbClr val="ED97A5"/>
+          </a:solidFill>
+          <a:ln>
+            <a:noFill/>
+          </a:ln>
+        </p:spPr>
+        <p:txBody>
+          <a:bodyPr rtlCol="0" anchor="ctr"/>
+          <a:lstStyle/>
+          <a:p>
+            <a:pPr algn="ctr"/>
+          </a:p>
+        </p:txBody>
+      </p:sp>
+      <p:sp>
+        <p:nvSpPr>
+          <p:cNvPr id="8" name="번호 1"/>
+          <p:cNvSpPr/>
+          <p:nvPr/>
+        </p:nvSpPr>
+        <p:spPr>
+          <a:xfrm>
+            <a:off x="822959" y="1965960"/>
             <a:ext cx="457200" cy="457200"/>
           </a:xfrm>
           <a:prstGeom prst="ellipse">
             <a:avLst/>
           </a:prstGeom>
           <a:solidFill>
-            <a:srgbClr val="DF3A55"/>
+            <a:srgbClr val="F3CBBA"/>
           </a:solidFill>
           <a:ln>
             <a:noFill/>
@@ -5127,7 +5366,7 @@
             <a:r>
               <a:rPr sz="1600" b="1" i="0">
                 <a:solidFill>
-                  <a:srgbClr val="FFFFFF"/>
+                  <a:srgbClr val="26231F"/>
                 </a:solidFill>
               </a:rPr>
               <a:t>1</a:t>
@@ -5137,14 +5376,14 @@
       </p:sp>
       <p:sp>
         <p:nvSpPr>
-          <p:cNvPr id="7" name="TextBox 6"/>
+          <p:cNvPr id="9" name="TextBox 8"/>
           <p:cNvSpPr txBox="1"/>
           <p:nvPr/>
         </p:nvSpPr>
         <p:spPr>
           <a:xfrm>
-            <a:off x="960120" y="2331720"/>
-            <a:ext cx="2190673" cy="640080"/>
+            <a:off x="777240" y="2560320"/>
+            <a:ext cx="2282113" cy="640080"/>
           </a:xfrm>
           <a:prstGeom prst="rect">
             <a:avLst/>
@@ -5165,7 +5404,7 @@
             <a:r>
               <a:rPr sz="1800" b="1" i="0">
                 <a:solidFill>
-                  <a:srgbClr val="721D2B"/>
+                  <a:srgbClr val="49272D"/>
                 </a:solidFill>
               </a:rPr>
               <a:t>첫 웃음</a:t>
@@ -5175,14 +5414,14 @@
       </p:sp>
       <p:sp>
         <p:nvSpPr>
-          <p:cNvPr id="8" name="TextBox 7"/>
+          <p:cNvPr id="10" name="TextBox 9"/>
           <p:cNvSpPr txBox="1"/>
           <p:nvPr/>
         </p:nvSpPr>
         <p:spPr>
           <a:xfrm>
-            <a:off x="960120" y="3017520"/>
-            <a:ext cx="2190673" cy="3017520"/>
+            <a:off x="777240" y="3246120"/>
+            <a:ext cx="2282113" cy="2971800"/>
           </a:xfrm>
           <a:prstGeom prst="rect">
             <a:avLst/>
@@ -5203,7 +5442,7 @@
             <a:r>
               <a:rPr sz="1500" b="0" i="0">
                 <a:solidFill>
-                  <a:srgbClr val="2B2B2B"/>
+                  <a:srgbClr val="26231F"/>
                 </a:solidFill>
               </a:rPr>
               <a:t>언제였나요?</a:t>
@@ -5213,26 +5452,26 @@
       </p:sp>
       <p:sp>
         <p:nvSpPr>
-          <p:cNvPr id="9" name="카드 2"/>
+          <p:cNvPr id="11" name="카드 2"/>
           <p:cNvSpPr/>
           <p:nvPr/>
         </p:nvSpPr>
         <p:spPr>
           <a:xfrm>
-            <a:off x="3516553" y="1554480"/>
-            <a:ext cx="2464993" cy="4617720"/>
+            <a:off x="3425113" y="1783080"/>
+            <a:ext cx="2556433" cy="4572000"/>
           </a:xfrm>
           <a:prstGeom prst="roundRect">
             <a:avLst>
-              <a:gd name="adj" fmla="val 8000"/>
+              <a:gd name="adj" fmla="val 3000"/>
             </a:avLst>
           </a:prstGeom>
           <a:solidFill>
-            <a:srgbClr val="FCF3F4"/>
+            <a:srgbClr val="FFFFFF"/>
           </a:solidFill>
-          <a:ln w="15875">
+          <a:ln w="9525">
             <a:solidFill>
-              <a:srgbClr val="F7D4DA"/>
+              <a:srgbClr val="FAD1D8"/>
             </a:solidFill>
           </a:ln>
         </p:spPr>
@@ -5246,20 +5485,49 @@
       </p:sp>
       <p:sp>
         <p:nvSpPr>
-          <p:cNvPr id="10" name="번호 2"/>
+          <p:cNvPr id="12" name="위쪽 띠"/>
           <p:cNvSpPr/>
           <p:nvPr/>
         </p:nvSpPr>
         <p:spPr>
           <a:xfrm>
-            <a:off x="3699433" y="1737360"/>
+            <a:off x="3434257" y="1792224"/>
+            <a:ext cx="2538145" cy="82296"/>
+          </a:xfrm>
+          <a:prstGeom prst="rect">
+            <a:avLst/>
+          </a:prstGeom>
+          <a:solidFill>
+            <a:srgbClr val="ED97A5"/>
+          </a:solidFill>
+          <a:ln>
+            <a:noFill/>
+          </a:ln>
+        </p:spPr>
+        <p:txBody>
+          <a:bodyPr rtlCol="0" anchor="ctr"/>
+          <a:lstStyle/>
+          <a:p>
+            <a:pPr algn="ctr"/>
+          </a:p>
+        </p:txBody>
+      </p:sp>
+      <p:sp>
+        <p:nvSpPr>
+          <p:cNvPr id="13" name="번호 2"/>
+          <p:cNvSpPr/>
+          <p:nvPr/>
+        </p:nvSpPr>
+        <p:spPr>
+          <a:xfrm>
+            <a:off x="3607993" y="1965960"/>
             <a:ext cx="457200" cy="457200"/>
           </a:xfrm>
           <a:prstGeom prst="ellipse">
             <a:avLst/>
           </a:prstGeom>
           <a:solidFill>
-            <a:srgbClr val="DF3A55"/>
+            <a:srgbClr val="F3CBBA"/>
           </a:solidFill>
           <a:ln>
             <a:noFill/>
@@ -5279,7 +5547,7 @@
             <a:r>
               <a:rPr sz="1600" b="1" i="0">
                 <a:solidFill>
-                  <a:srgbClr val="FFFFFF"/>
+                  <a:srgbClr val="26231F"/>
                 </a:solidFill>
               </a:rPr>
               <a:t>2</a:t>
@@ -5289,14 +5557,14 @@
       </p:sp>
       <p:sp>
         <p:nvSpPr>
-          <p:cNvPr id="11" name="TextBox 10"/>
+          <p:cNvPr id="14" name="TextBox 13"/>
           <p:cNvSpPr txBox="1"/>
           <p:nvPr/>
         </p:nvSpPr>
         <p:spPr>
           <a:xfrm>
-            <a:off x="3653713" y="2331720"/>
-            <a:ext cx="2190673" cy="640080"/>
+            <a:off x="3562273" y="2560320"/>
+            <a:ext cx="2282113" cy="640080"/>
           </a:xfrm>
           <a:prstGeom prst="rect">
             <a:avLst/>
@@ -5317,7 +5585,7 @@
             <a:r>
               <a:rPr sz="1800" b="1" i="0">
                 <a:solidFill>
-                  <a:srgbClr val="721D2B"/>
+                  <a:srgbClr val="49272D"/>
                 </a:solidFill>
               </a:rPr>
               <a:t>첫 뒤집기</a:t>
@@ -5327,14 +5595,14 @@
       </p:sp>
       <p:sp>
         <p:nvSpPr>
-          <p:cNvPr id="12" name="TextBox 11"/>
+          <p:cNvPr id="15" name="TextBox 14"/>
           <p:cNvSpPr txBox="1"/>
           <p:nvPr/>
         </p:nvSpPr>
         <p:spPr>
           <a:xfrm>
-            <a:off x="3653713" y="3017520"/>
-            <a:ext cx="2190673" cy="3017520"/>
+            <a:off x="3562273" y="3246120"/>
+            <a:ext cx="2282113" cy="2971800"/>
           </a:xfrm>
           <a:prstGeom prst="rect">
             <a:avLst/>
@@ -5355,7 +5623,7 @@
             <a:r>
               <a:rPr sz="1500" b="0" i="0">
                 <a:solidFill>
-                  <a:srgbClr val="2B2B2B"/>
+                  <a:srgbClr val="26231F"/>
                 </a:solidFill>
               </a:rPr>
               <a:t>언제였나요?</a:t>
@@ -5365,26 +5633,26 @@
       </p:sp>
       <p:sp>
         <p:nvSpPr>
-          <p:cNvPr id="13" name="카드 3"/>
+          <p:cNvPr id="16" name="카드 3"/>
           <p:cNvSpPr/>
           <p:nvPr/>
         </p:nvSpPr>
         <p:spPr>
           <a:xfrm>
-            <a:off x="6210147" y="1554480"/>
-            <a:ext cx="2464993" cy="4617720"/>
+            <a:off x="6210147" y="1783080"/>
+            <a:ext cx="2556433" cy="4572000"/>
           </a:xfrm>
           <a:prstGeom prst="roundRect">
             <a:avLst>
-              <a:gd name="adj" fmla="val 8000"/>
+              <a:gd name="adj" fmla="val 3000"/>
             </a:avLst>
           </a:prstGeom>
           <a:solidFill>
-            <a:srgbClr val="FCF3F4"/>
+            <a:srgbClr val="FFFFFF"/>
           </a:solidFill>
-          <a:ln w="15875">
+          <a:ln w="9525">
             <a:solidFill>
-              <a:srgbClr val="F7D4DA"/>
+              <a:srgbClr val="FAD1D8"/>
             </a:solidFill>
           </a:ln>
         </p:spPr>
@@ -5398,20 +5666,49 @@
       </p:sp>
       <p:sp>
         <p:nvSpPr>
-          <p:cNvPr id="14" name="번호 3"/>
+          <p:cNvPr id="17" name="위쪽 띠"/>
           <p:cNvSpPr/>
           <p:nvPr/>
         </p:nvSpPr>
         <p:spPr>
           <a:xfrm>
-            <a:off x="6393027" y="1737360"/>
+            <a:off x="6219291" y="1792224"/>
+            <a:ext cx="2538145" cy="82296"/>
+          </a:xfrm>
+          <a:prstGeom prst="rect">
+            <a:avLst/>
+          </a:prstGeom>
+          <a:solidFill>
+            <a:srgbClr val="ED97A5"/>
+          </a:solidFill>
+          <a:ln>
+            <a:noFill/>
+          </a:ln>
+        </p:spPr>
+        <p:txBody>
+          <a:bodyPr rtlCol="0" anchor="ctr"/>
+          <a:lstStyle/>
+          <a:p>
+            <a:pPr algn="ctr"/>
+          </a:p>
+        </p:txBody>
+      </p:sp>
+      <p:sp>
+        <p:nvSpPr>
+          <p:cNvPr id="18" name="번호 3"/>
+          <p:cNvSpPr/>
+          <p:nvPr/>
+        </p:nvSpPr>
+        <p:spPr>
+          <a:xfrm>
+            <a:off x="6393027" y="1965960"/>
             <a:ext cx="457200" cy="457200"/>
           </a:xfrm>
           <a:prstGeom prst="ellipse">
             <a:avLst/>
           </a:prstGeom>
           <a:solidFill>
-            <a:srgbClr val="DF3A55"/>
+            <a:srgbClr val="F3CBBA"/>
           </a:solidFill>
           <a:ln>
             <a:noFill/>
@@ -5431,7 +5728,7 @@
             <a:r>
               <a:rPr sz="1600" b="1" i="0">
                 <a:solidFill>
-                  <a:srgbClr val="FFFFFF"/>
+                  <a:srgbClr val="26231F"/>
                 </a:solidFill>
               </a:rPr>
               <a:t>3</a:t>
@@ -5441,14 +5738,14 @@
       </p:sp>
       <p:sp>
         <p:nvSpPr>
-          <p:cNvPr id="15" name="TextBox 14"/>
+          <p:cNvPr id="19" name="TextBox 18"/>
           <p:cNvSpPr txBox="1"/>
           <p:nvPr/>
         </p:nvSpPr>
         <p:spPr>
           <a:xfrm>
-            <a:off x="6347307" y="2331720"/>
-            <a:ext cx="2190673" cy="640080"/>
+            <a:off x="6347307" y="2560320"/>
+            <a:ext cx="2282113" cy="640080"/>
           </a:xfrm>
           <a:prstGeom prst="rect">
             <a:avLst/>
@@ -5469,7 +5766,7 @@
             <a:r>
               <a:rPr sz="1800" b="1" i="0">
                 <a:solidFill>
-                  <a:srgbClr val="721D2B"/>
+                  <a:srgbClr val="49272D"/>
                 </a:solidFill>
               </a:rPr>
               <a:t>첫 이</a:t>
@@ -5479,14 +5776,14 @@
       </p:sp>
       <p:sp>
         <p:nvSpPr>
-          <p:cNvPr id="16" name="TextBox 15"/>
+          <p:cNvPr id="20" name="TextBox 19"/>
           <p:cNvSpPr txBox="1"/>
           <p:nvPr/>
         </p:nvSpPr>
         <p:spPr>
           <a:xfrm>
-            <a:off x="6347307" y="3017520"/>
-            <a:ext cx="2190673" cy="3017520"/>
+            <a:off x="6347307" y="3246120"/>
+            <a:ext cx="2282113" cy="2971800"/>
           </a:xfrm>
           <a:prstGeom prst="rect">
             <a:avLst/>
@@ -5507,7 +5804,7 @@
             <a:r>
               <a:rPr sz="1500" b="0" i="0">
                 <a:solidFill>
-                  <a:srgbClr val="2B2B2B"/>
+                  <a:srgbClr val="26231F"/>
                 </a:solidFill>
               </a:rPr>
               <a:t>언제였나요?</a:t>
@@ -5517,26 +5814,26 @@
       </p:sp>
       <p:sp>
         <p:nvSpPr>
-          <p:cNvPr id="17" name="카드 4"/>
+          <p:cNvPr id="21" name="카드 4"/>
           <p:cNvSpPr/>
           <p:nvPr/>
         </p:nvSpPr>
         <p:spPr>
           <a:xfrm>
-            <a:off x="8903741" y="1554480"/>
-            <a:ext cx="2464993" cy="4617720"/>
+            <a:off x="8995181" y="1783080"/>
+            <a:ext cx="2556433" cy="4572000"/>
           </a:xfrm>
           <a:prstGeom prst="roundRect">
             <a:avLst>
-              <a:gd name="adj" fmla="val 8000"/>
+              <a:gd name="adj" fmla="val 3000"/>
             </a:avLst>
           </a:prstGeom>
           <a:solidFill>
-            <a:srgbClr val="FCF3F4"/>
+            <a:srgbClr val="FFFFFF"/>
           </a:solidFill>
-          <a:ln w="15875">
+          <a:ln w="9525">
             <a:solidFill>
-              <a:srgbClr val="F7D4DA"/>
+              <a:srgbClr val="FAD1D8"/>
             </a:solidFill>
           </a:ln>
         </p:spPr>
@@ -5550,20 +5847,49 @@
       </p:sp>
       <p:sp>
         <p:nvSpPr>
-          <p:cNvPr id="18" name="번호 4"/>
+          <p:cNvPr id="22" name="위쪽 띠"/>
           <p:cNvSpPr/>
           <p:nvPr/>
         </p:nvSpPr>
         <p:spPr>
           <a:xfrm>
-            <a:off x="9086621" y="1737360"/>
+            <a:off x="9004325" y="1792224"/>
+            <a:ext cx="2538145" cy="82296"/>
+          </a:xfrm>
+          <a:prstGeom prst="rect">
+            <a:avLst/>
+          </a:prstGeom>
+          <a:solidFill>
+            <a:srgbClr val="ED97A5"/>
+          </a:solidFill>
+          <a:ln>
+            <a:noFill/>
+          </a:ln>
+        </p:spPr>
+        <p:txBody>
+          <a:bodyPr rtlCol="0" anchor="ctr"/>
+          <a:lstStyle/>
+          <a:p>
+            <a:pPr algn="ctr"/>
+          </a:p>
+        </p:txBody>
+      </p:sp>
+      <p:sp>
+        <p:nvSpPr>
+          <p:cNvPr id="23" name="번호 4"/>
+          <p:cNvSpPr/>
+          <p:nvPr/>
+        </p:nvSpPr>
+        <p:spPr>
+          <a:xfrm>
+            <a:off x="9178061" y="1965960"/>
             <a:ext cx="457200" cy="457200"/>
           </a:xfrm>
           <a:prstGeom prst="ellipse">
             <a:avLst/>
           </a:prstGeom>
           <a:solidFill>
-            <a:srgbClr val="DF3A55"/>
+            <a:srgbClr val="F3CBBA"/>
           </a:solidFill>
           <a:ln>
             <a:noFill/>
@@ -5583,7 +5909,7 @@
             <a:r>
               <a:rPr sz="1600" b="1" i="0">
                 <a:solidFill>
-                  <a:srgbClr val="FFFFFF"/>
+                  <a:srgbClr val="26231F"/>
                 </a:solidFill>
               </a:rPr>
               <a:t>4</a:t>
@@ -5593,14 +5919,14 @@
       </p:sp>
       <p:sp>
         <p:nvSpPr>
-          <p:cNvPr id="19" name="TextBox 18"/>
+          <p:cNvPr id="24" name="TextBox 23"/>
           <p:cNvSpPr txBox="1"/>
           <p:nvPr/>
         </p:nvSpPr>
         <p:spPr>
           <a:xfrm>
-            <a:off x="9040901" y="2331720"/>
-            <a:ext cx="2190673" cy="640080"/>
+            <a:off x="9132341" y="2560320"/>
+            <a:ext cx="2282113" cy="640080"/>
           </a:xfrm>
           <a:prstGeom prst="rect">
             <a:avLst/>
@@ -5621,7 +5947,7 @@
             <a:r>
               <a:rPr sz="1800" b="1" i="0">
                 <a:solidFill>
-                  <a:srgbClr val="721D2B"/>
+                  <a:srgbClr val="49272D"/>
                 </a:solidFill>
               </a:rPr>
               <a:t>첫 걸음</a:t>
@@ -5631,14 +5957,14 @@
       </p:sp>
       <p:sp>
         <p:nvSpPr>
-          <p:cNvPr id="20" name="TextBox 19"/>
+          <p:cNvPr id="25" name="TextBox 24"/>
           <p:cNvSpPr txBox="1"/>
           <p:nvPr/>
         </p:nvSpPr>
         <p:spPr>
           <a:xfrm>
-            <a:off x="9040901" y="3017520"/>
-            <a:ext cx="2190673" cy="3017520"/>
+            <a:off x="9132341" y="3246120"/>
+            <a:ext cx="2282113" cy="2971800"/>
           </a:xfrm>
           <a:prstGeom prst="rect">
             <a:avLst/>
@@ -5659,7 +5985,7 @@
             <a:r>
               <a:rPr sz="1500" b="0" i="0">
                 <a:solidFill>
-                  <a:srgbClr val="2B2B2B"/>
+                  <a:srgbClr val="26231F"/>
                 </a:solidFill>
               </a:rPr>
               <a:t>언제였나요?</a:t>
@@ -5681,7 +6007,7 @@
     <p:bg>
       <p:bgPr>
         <a:solidFill>
-          <a:srgbClr val="FCF3F4"/>
+          <a:srgbClr val="FFFFFF"/>
         </a:solidFill>
         <a:effectLst/>
       </p:bgPr>
@@ -5701,46 +6027,84 @@
         </p:nvSpPr>
         <p:spPr>
           <a:xfrm>
-            <a:off x="256032" y="256032"/>
-            <a:ext cx="11679631" cy="6345936"/>
+            <a:off x="10180015" y="-1645920"/>
+            <a:ext cx="3474720" cy="3474720"/>
+          </a:xfrm>
+          <a:prstGeom prst="ellipse">
+            <a:avLst/>
+          </a:prstGeom>
+          <a:solidFill>
+            <a:srgbClr val="F2A6B3"/>
+          </a:solidFill>
+          <a:ln>
+            <a:noFill/>
+          </a:ln>
+        </p:spPr>
+        <p:txBody>
+          <a:bodyPr rtlCol="0" anchor="ctr"/>
+          <a:lstStyle/>
+          <a:p>
+            <a:pPr algn="ctr"/>
+          </a:p>
+        </p:txBody>
+      </p:sp>
+      <p:sp>
+        <p:nvSpPr>
+          <p:cNvPr id="4" name="상단 라벨"/>
+          <p:cNvSpPr txBox="1"/>
+          <p:nvPr/>
+        </p:nvSpPr>
+        <p:spPr>
+          <a:xfrm>
+            <a:off x="640080" y="274320"/>
+            <a:ext cx="5486400" cy="274320"/>
           </a:xfrm>
           <a:prstGeom prst="rect">
             <a:avLst/>
           </a:prstGeom>
           <a:noFill/>
-          <a:ln w="28575">
-            <a:solidFill>
-              <a:srgbClr val="DF3A55"/>
-            </a:solidFill>
-          </a:ln>
-        </p:spPr>
-        <p:txBody>
-          <a:bodyPr rtlCol="0" anchor="ctr"/>
-          <a:lstStyle/>
-          <a:p>
-            <a:pPr algn="ctr"/>
-          </a:p>
-        </p:txBody>
-      </p:sp>
-      <p:sp>
-        <p:nvSpPr>
-          <p:cNvPr id="4" name="장식"/>
+        </p:spPr>
+        <p:txBody>
+          <a:bodyPr wrap="square" lIns="54864" rIns="54864" tIns="27432" bIns="27432" anchor="ctr">
+            <a:noAutofit/>
+          </a:bodyPr>
+          <a:lstStyle/>
+          <a:p>
+            <a:pPr algn="l">
+              <a:lnSpc>
+                <a:spcPct val="115000"/>
+              </a:lnSpc>
+            </a:pPr>
+            <a:r>
+              <a:rPr sz="900" b="1" i="0" spc="250">
+                <a:solidFill>
+                  <a:srgbClr val="26231F"/>
+                </a:solidFill>
+              </a:rPr>
+              <a:t>FIRST BIRTHDAY</a:t>
+            </a:r>
+          </a:p>
+        </p:txBody>
+      </p:sp>
+      <p:sp>
+        <p:nvSpPr>
+          <p:cNvPr id="5" name="포인트"/>
           <p:cNvSpPr/>
           <p:nvPr/>
         </p:nvSpPr>
         <p:spPr>
           <a:xfrm>
-            <a:off x="384048" y="384048"/>
-            <a:ext cx="11423599" cy="6089904"/>
-          </a:xfrm>
-          <a:prstGeom prst="rect">
+            <a:off x="11048695" y="502919"/>
+            <a:ext cx="274320" cy="274320"/>
+          </a:xfrm>
+          <a:prstGeom prst="sun">
             <a:avLst/>
           </a:prstGeom>
-          <a:noFill/>
-          <a:ln w="9525">
-            <a:solidFill>
-              <a:srgbClr val="F7D4DA"/>
-            </a:solidFill>
+          <a:solidFill>
+            <a:srgbClr val="FFFFFF"/>
+          </a:solidFill>
+          <a:ln>
+            <a:noFill/>
           </a:ln>
         </p:spPr>
         <p:txBody>
@@ -5763,8 +6127,8 @@
         </p:nvSpPr>
         <p:spPr>
           <a:xfrm>
-            <a:off x="822960" y="548640"/>
-            <a:ext cx="9265615" cy="822960"/>
+            <a:off x="640080" y="658368"/>
+            <a:ext cx="9082735" cy="868680"/>
           </a:xfrm>
         </p:spPr>
         <p:txBody>
@@ -5781,7 +6145,7 @@
             <a:r>
               <a:rPr sz="3000" b="1" i="0">
                 <a:solidFill>
-                  <a:srgbClr val="721D2B"/>
+                  <a:srgbClr val="26231F"/>
                 </a:solidFill>
               </a:rPr>
               <a:t>사진 모음</a:t>
@@ -5791,14 +6155,14 @@
       </p:sp>
       <p:sp>
         <p:nvSpPr>
-          <p:cNvPr id="5" name="사진 자리"/>
+          <p:cNvPr id="6" name="사진 자리"/>
           <p:cNvSpPr/>
           <p:nvPr/>
         </p:nvSpPr>
         <p:spPr>
           <a:xfrm>
-            <a:off x="822960" y="1554480"/>
-            <a:ext cx="2499283" cy="2217420"/>
+            <a:off x="640080" y="1783080"/>
+            <a:ext cx="2590723" cy="2194560"/>
           </a:xfrm>
           <a:prstGeom prst="roundRect">
             <a:avLst>
@@ -5806,12 +6170,10 @@
             </a:avLst>
           </a:prstGeom>
           <a:solidFill>
-            <a:srgbClr val="F7D4DA"/>
+            <a:srgbClr val="FAD1D8"/>
           </a:solidFill>
           <a:ln w="19050">
-            <a:solidFill>
-              <a:srgbClr val="DF3A55"/>
-            </a:solidFill>
+            <a:noFill/>
             <a:prstDash val="dash"/>
           </a:ln>
         </p:spPr>
@@ -5829,7 +6191,7 @@
             <a:r>
               <a:rPr sz="1200" b="0" i="0">
                 <a:solidFill>
-                  <a:srgbClr val="721D2B"/>
+                  <a:srgbClr val="8E8780"/>
                 </a:solidFill>
               </a:rPr>
               <a:t>사진 1</a:t>
@@ -5839,14 +6201,14 @@
       </p:sp>
       <p:sp>
         <p:nvSpPr>
-          <p:cNvPr id="6" name="사진 자리"/>
+          <p:cNvPr id="7" name="사진 자리"/>
           <p:cNvSpPr/>
           <p:nvPr/>
         </p:nvSpPr>
         <p:spPr>
           <a:xfrm>
-            <a:off x="3505123" y="1554480"/>
-            <a:ext cx="2499283" cy="2217420"/>
+            <a:off x="3413683" y="1783080"/>
+            <a:ext cx="2590723" cy="2194560"/>
           </a:xfrm>
           <a:prstGeom prst="roundRect">
             <a:avLst>
@@ -5854,12 +6216,10 @@
             </a:avLst>
           </a:prstGeom>
           <a:solidFill>
-            <a:srgbClr val="F7D4DA"/>
+            <a:srgbClr val="FAD1D8"/>
           </a:solidFill>
           <a:ln w="19050">
-            <a:solidFill>
-              <a:srgbClr val="DF3A55"/>
-            </a:solidFill>
+            <a:noFill/>
             <a:prstDash val="dash"/>
           </a:ln>
         </p:spPr>
@@ -5877,7 +6237,7 @@
             <a:r>
               <a:rPr sz="1200" b="0" i="0">
                 <a:solidFill>
-                  <a:srgbClr val="721D2B"/>
+                  <a:srgbClr val="8E8780"/>
                 </a:solidFill>
               </a:rPr>
               <a:t>사진 2</a:t>
@@ -5887,14 +6247,14 @@
       </p:sp>
       <p:sp>
         <p:nvSpPr>
-          <p:cNvPr id="7" name="사진 자리"/>
+          <p:cNvPr id="8" name="사진 자리"/>
           <p:cNvSpPr/>
           <p:nvPr/>
         </p:nvSpPr>
         <p:spPr>
           <a:xfrm>
-            <a:off x="6187287" y="1554480"/>
-            <a:ext cx="2499283" cy="2217420"/>
+            <a:off x="6187287" y="1783080"/>
+            <a:ext cx="2590723" cy="2194560"/>
           </a:xfrm>
           <a:prstGeom prst="roundRect">
             <a:avLst>
@@ -5902,12 +6262,10 @@
             </a:avLst>
           </a:prstGeom>
           <a:solidFill>
-            <a:srgbClr val="F7D4DA"/>
+            <a:srgbClr val="FAD1D8"/>
           </a:solidFill>
           <a:ln w="19050">
-            <a:solidFill>
-              <a:srgbClr val="DF3A55"/>
-            </a:solidFill>
+            <a:noFill/>
             <a:prstDash val="dash"/>
           </a:ln>
         </p:spPr>
@@ -5925,7 +6283,7 @@
             <a:r>
               <a:rPr sz="1200" b="0" i="0">
                 <a:solidFill>
-                  <a:srgbClr val="721D2B"/>
+                  <a:srgbClr val="8E8780"/>
                 </a:solidFill>
               </a:rPr>
               <a:t>사진 3</a:t>
@@ -5935,14 +6293,14 @@
       </p:sp>
       <p:sp>
         <p:nvSpPr>
-          <p:cNvPr id="8" name="사진 자리"/>
+          <p:cNvPr id="9" name="사진 자리"/>
           <p:cNvSpPr/>
           <p:nvPr/>
         </p:nvSpPr>
         <p:spPr>
           <a:xfrm>
-            <a:off x="8869451" y="1554480"/>
-            <a:ext cx="2499283" cy="2217420"/>
+            <a:off x="8960891" y="1783080"/>
+            <a:ext cx="2590723" cy="2194560"/>
           </a:xfrm>
           <a:prstGeom prst="roundRect">
             <a:avLst>
@@ -5950,12 +6308,10 @@
             </a:avLst>
           </a:prstGeom>
           <a:solidFill>
-            <a:srgbClr val="F7D4DA"/>
+            <a:srgbClr val="FAD1D8"/>
           </a:solidFill>
           <a:ln w="19050">
-            <a:solidFill>
-              <a:srgbClr val="DF3A55"/>
-            </a:solidFill>
+            <a:noFill/>
             <a:prstDash val="dash"/>
           </a:ln>
         </p:spPr>
@@ -5973,7 +6329,7 @@
             <a:r>
               <a:rPr sz="1200" b="0" i="0">
                 <a:solidFill>
-                  <a:srgbClr val="721D2B"/>
+                  <a:srgbClr val="8E8780"/>
                 </a:solidFill>
               </a:rPr>
               <a:t>사진 4</a:t>
@@ -5983,14 +6339,14 @@
       </p:sp>
       <p:sp>
         <p:nvSpPr>
-          <p:cNvPr id="9" name="사진 자리"/>
+          <p:cNvPr id="10" name="사진 자리"/>
           <p:cNvSpPr/>
           <p:nvPr/>
         </p:nvSpPr>
         <p:spPr>
           <a:xfrm>
-            <a:off x="822960" y="3954780"/>
-            <a:ext cx="2499283" cy="2217420"/>
+            <a:off x="640080" y="4160520"/>
+            <a:ext cx="2590723" cy="2194560"/>
           </a:xfrm>
           <a:prstGeom prst="roundRect">
             <a:avLst>
@@ -5998,12 +6354,10 @@
             </a:avLst>
           </a:prstGeom>
           <a:solidFill>
-            <a:srgbClr val="F7D4DA"/>
+            <a:srgbClr val="FAD1D8"/>
           </a:solidFill>
           <a:ln w="19050">
-            <a:solidFill>
-              <a:srgbClr val="DF3A55"/>
-            </a:solidFill>
+            <a:noFill/>
             <a:prstDash val="dash"/>
           </a:ln>
         </p:spPr>
@@ -6021,7 +6375,7 @@
             <a:r>
               <a:rPr sz="1200" b="0" i="0">
                 <a:solidFill>
-                  <a:srgbClr val="721D2B"/>
+                  <a:srgbClr val="8E8780"/>
                 </a:solidFill>
               </a:rPr>
               <a:t>사진 5</a:t>
@@ -6031,14 +6385,14 @@
       </p:sp>
       <p:sp>
         <p:nvSpPr>
-          <p:cNvPr id="10" name="사진 자리"/>
+          <p:cNvPr id="11" name="사진 자리"/>
           <p:cNvSpPr/>
           <p:nvPr/>
         </p:nvSpPr>
         <p:spPr>
           <a:xfrm>
-            <a:off x="3505123" y="3954780"/>
-            <a:ext cx="2499283" cy="2217420"/>
+            <a:off x="3413683" y="4160520"/>
+            <a:ext cx="2590723" cy="2194560"/>
           </a:xfrm>
           <a:prstGeom prst="roundRect">
             <a:avLst>
@@ -6046,12 +6400,10 @@
             </a:avLst>
           </a:prstGeom>
           <a:solidFill>
-            <a:srgbClr val="F7D4DA"/>
+            <a:srgbClr val="FAD1D8"/>
           </a:solidFill>
           <a:ln w="19050">
-            <a:solidFill>
-              <a:srgbClr val="DF3A55"/>
-            </a:solidFill>
+            <a:noFill/>
             <a:prstDash val="dash"/>
           </a:ln>
         </p:spPr>
@@ -6069,7 +6421,7 @@
             <a:r>
               <a:rPr sz="1200" b="0" i="0">
                 <a:solidFill>
-                  <a:srgbClr val="721D2B"/>
+                  <a:srgbClr val="8E8780"/>
                 </a:solidFill>
               </a:rPr>
               <a:t>사진 6</a:t>
@@ -6079,14 +6431,14 @@
       </p:sp>
       <p:sp>
         <p:nvSpPr>
-          <p:cNvPr id="11" name="사진 자리"/>
+          <p:cNvPr id="12" name="사진 자리"/>
           <p:cNvSpPr/>
           <p:nvPr/>
         </p:nvSpPr>
         <p:spPr>
           <a:xfrm>
-            <a:off x="6187287" y="3954780"/>
-            <a:ext cx="2499283" cy="2217420"/>
+            <a:off x="6187287" y="4160520"/>
+            <a:ext cx="2590723" cy="2194560"/>
           </a:xfrm>
           <a:prstGeom prst="roundRect">
             <a:avLst>
@@ -6094,12 +6446,10 @@
             </a:avLst>
           </a:prstGeom>
           <a:solidFill>
-            <a:srgbClr val="F7D4DA"/>
+            <a:srgbClr val="FAD1D8"/>
           </a:solidFill>
           <a:ln w="19050">
-            <a:solidFill>
-              <a:srgbClr val="DF3A55"/>
-            </a:solidFill>
+            <a:noFill/>
             <a:prstDash val="dash"/>
           </a:ln>
         </p:spPr>
@@ -6117,7 +6467,7 @@
             <a:r>
               <a:rPr sz="1200" b="0" i="0">
                 <a:solidFill>
-                  <a:srgbClr val="721D2B"/>
+                  <a:srgbClr val="8E8780"/>
                 </a:solidFill>
               </a:rPr>
               <a:t>사진 7</a:t>
@@ -6127,14 +6477,14 @@
       </p:sp>
       <p:sp>
         <p:nvSpPr>
-          <p:cNvPr id="12" name="사진 자리"/>
+          <p:cNvPr id="13" name="사진 자리"/>
           <p:cNvSpPr/>
           <p:nvPr/>
         </p:nvSpPr>
         <p:spPr>
           <a:xfrm>
-            <a:off x="8869451" y="3954780"/>
-            <a:ext cx="2499283" cy="2217420"/>
+            <a:off x="8960891" y="4160520"/>
+            <a:ext cx="2590723" cy="2194560"/>
           </a:xfrm>
           <a:prstGeom prst="roundRect">
             <a:avLst>
@@ -6142,12 +6492,10 @@
             </a:avLst>
           </a:prstGeom>
           <a:solidFill>
-            <a:srgbClr val="F7D4DA"/>
+            <a:srgbClr val="FAD1D8"/>
           </a:solidFill>
           <a:ln w="19050">
-            <a:solidFill>
-              <a:srgbClr val="DF3A55"/>
-            </a:solidFill>
+            <a:noFill/>
             <a:prstDash val="dash"/>
           </a:ln>
         </p:spPr>
@@ -6165,7 +6513,7 @@
             <a:r>
               <a:rPr sz="1200" b="0" i="0">
                 <a:solidFill>
-                  <a:srgbClr val="721D2B"/>
+                  <a:srgbClr val="8E8780"/>
                 </a:solidFill>
               </a:rPr>
               <a:t>사진 8</a:t>
@@ -6184,6 +6532,14 @@
 <file path=ppt/slides/slide6.xml><?xml version="1.0" encoding="utf-8"?>
 <p:sld xmlns:a="http://schemas.openxmlformats.org/drawingml/2006/main" xmlns:p="http://schemas.openxmlformats.org/presentationml/2006/main" xmlns:r="http://schemas.openxmlformats.org/officeDocument/2006/relationships">
   <p:cSld>
+    <p:bg>
+      <p:bgPr>
+        <a:solidFill>
+          <a:srgbClr val="FDEAED"/>
+        </a:solidFill>
+        <a:effectLst/>
+      </p:bgPr>
+    </p:bg>
     <p:spTree>
       <p:nvGrpSpPr>
         <p:cNvPr id="1" name=""/>
@@ -6191,30 +6547,120 @@
         <p:nvPr/>
       </p:nvGrpSpPr>
       <p:grpSpPr/>
-      <p:pic>
-        <p:nvPicPr>
-          <p:cNvPr id="3" name="표지 그림" descr="birthday-10.jpg"/>
-          <p:cNvPicPr>
-            <a:picLocks noChangeAspect="1"/>
-          </p:cNvPicPr>
+      <p:sp>
+        <p:nvSpPr>
+          <p:cNvPr id="3" name="사진 자리"/>
+          <p:cNvSpPr/>
           <p:nvPr/>
-        </p:nvPicPr>
-        <p:blipFill>
-          <a:blip r:embed="rId2"/>
-          <a:stretch>
-            <a:fillRect/>
-          </a:stretch>
-        </p:blipFill>
-        <p:spPr>
-          <a:xfrm>
-            <a:off x="0" y="0"/>
-            <a:ext cx="12191695" cy="6858000"/>
+        </p:nvSpPr>
+        <p:spPr>
+          <a:xfrm>
+            <a:off x="1463003" y="960120"/>
+            <a:ext cx="3657508" cy="4526280"/>
+          </a:xfrm>
+          <a:prstGeom prst="roundRect">
+            <a:avLst>
+              <a:gd name="adj" fmla="val 4000"/>
+            </a:avLst>
+          </a:prstGeom>
+          <a:solidFill>
+            <a:srgbClr val="F2A6B3"/>
+          </a:solidFill>
+          <a:ln>
+            <a:noFill/>
+          </a:ln>
+        </p:spPr>
+        <p:txBody>
+          <a:bodyPr rtlCol="0" anchor="ctr" wrap="square" lIns="54864" rIns="54864" tIns="27432" bIns="27432">
+            <a:noAutofit/>
+          </a:bodyPr>
+          <a:lstStyle/>
+          <a:p>
+            <a:pPr algn="ctr">
+              <a:lnSpc>
+                <a:spcPct val="100000"/>
+              </a:lnSpc>
+            </a:pPr>
+            <a:r>
+              <a:rPr sz="1400" b="0" i="0">
+                <a:solidFill>
+                  <a:srgbClr val="49272D"/>
+                </a:solidFill>
+              </a:rPr>
+              <a:t>사진을 넣어 주세요</a:t>
+            </a:r>
+          </a:p>
+        </p:txBody>
+      </p:sp>
+      <p:sp>
+        <p:nvSpPr>
+          <p:cNvPr id="4" name="장식"/>
+          <p:cNvSpPr/>
+          <p:nvPr/>
+        </p:nvSpPr>
+        <p:spPr>
+          <a:xfrm>
+            <a:off x="975335" y="1234439"/>
+            <a:ext cx="3657508" cy="4526280"/>
+          </a:xfrm>
+          <a:prstGeom prst="roundRect">
+            <a:avLst>
+              <a:gd name="adj" fmla="val 4000"/>
+            </a:avLst>
+          </a:prstGeom>
+          <a:noFill/>
+          <a:ln w="9525">
+            <a:solidFill>
+              <a:srgbClr val="26231F"/>
+            </a:solidFill>
+          </a:ln>
+        </p:spPr>
+        <p:txBody>
+          <a:bodyPr rtlCol="0" anchor="ctr"/>
+          <a:lstStyle/>
+          <a:p>
+            <a:pPr algn="ctr"/>
+          </a:p>
+        </p:txBody>
+      </p:sp>
+      <p:sp>
+        <p:nvSpPr>
+          <p:cNvPr id="5" name="라벨"/>
+          <p:cNvSpPr txBox="1"/>
+          <p:nvPr/>
+        </p:nvSpPr>
+        <p:spPr>
+          <a:xfrm>
+            <a:off x="6827349" y="2148840"/>
+            <a:ext cx="4632844" cy="274320"/>
           </a:xfrm>
           <a:prstGeom prst="rect">
             <a:avLst/>
           </a:prstGeom>
-        </p:spPr>
-      </p:pic>
+          <a:noFill/>
+        </p:spPr>
+        <p:txBody>
+          <a:bodyPr wrap="square" lIns="54864" rIns="54864" tIns="27432" bIns="27432" anchor="t">
+            <a:noAutofit/>
+          </a:bodyPr>
+          <a:lstStyle/>
+          <a:p>
+            <a:pPr algn="l">
+              <a:lnSpc>
+                <a:spcPct val="115000"/>
+              </a:lnSpc>
+            </a:pPr>
+            <a:r>
+              <a:rPr sz="1000" b="1" i="0" spc="250">
+                <a:solidFill>
+                  <a:srgbClr val="26231F"/>
+                </a:solidFill>
+              </a:rPr>
+              <a:t>FIRST BIRTHDAY</a:t>
+            </a:r>
+          </a:p>
+        </p:txBody>
+      </p:sp>
       <p:sp>
         <p:nvSpPr>
           <p:cNvPr id="2" name="Title 1"/>
@@ -6227,8 +6673,8 @@
         </p:nvSpPr>
         <p:spPr>
           <a:xfrm>
-            <a:off x="853418" y="2057400"/>
-            <a:ext cx="6095847" cy="1554480"/>
+            <a:off x="6827349" y="2606040"/>
+            <a:ext cx="4632844" cy="1188720"/>
           </a:xfrm>
         </p:spPr>
         <p:txBody>
@@ -6245,7 +6691,7 @@
             <a:r>
               <a:rPr sz="3400" b="1" i="0">
                 <a:solidFill>
-                  <a:srgbClr val="721D2B"/>
+                  <a:srgbClr val="26231F"/>
                 </a:solidFill>
               </a:rPr>
               <a:t>와 주셔서 고맙습니다</a:t>
@@ -6255,14 +6701,14 @@
       </p:sp>
       <p:sp>
         <p:nvSpPr>
-          <p:cNvPr id="4" name="한 줄 문구"/>
+          <p:cNvPr id="6" name="한 줄 문구"/>
           <p:cNvSpPr txBox="1"/>
           <p:nvPr/>
         </p:nvSpPr>
         <p:spPr>
           <a:xfrm>
-            <a:off x="853418" y="3749039"/>
-            <a:ext cx="6095847" cy="822960"/>
+            <a:off x="6827349" y="3886200"/>
+            <a:ext cx="4632844" cy="822960"/>
           </a:xfrm>
           <a:prstGeom prst="rect">
             <a:avLst/>
@@ -6281,9 +6727,9 @@
               </a:lnSpc>
             </a:pPr>
             <a:r>
-              <a:rPr sz="1700" b="0" i="1">
-                <a:solidFill>
-                  <a:srgbClr val="721D2B"/>
+              <a:rPr sz="1700" b="0" i="0">
+                <a:solidFill>
+                  <a:srgbClr val="26231F"/>
                 </a:solidFill>
               </a:rPr>
               <a:t>아이가 한 살이 되었습니다</a:t>
@@ -6293,14 +6739,14 @@
       </p:sp>
       <p:sp>
         <p:nvSpPr>
-          <p:cNvPr id="5" name="안내 문구"/>
+          <p:cNvPr id="7" name="안내 문구"/>
           <p:cNvSpPr txBox="1"/>
           <p:nvPr/>
         </p:nvSpPr>
         <p:spPr>
           <a:xfrm>
-            <a:off x="853418" y="4617720"/>
-            <a:ext cx="6095847" cy="914400"/>
+            <a:off x="6827349" y="4754880"/>
+            <a:ext cx="4632844" cy="914400"/>
           </a:xfrm>
           <a:prstGeom prst="rect">
             <a:avLst/>
@@ -6321,7 +6767,7 @@
             <a:r>
               <a:rPr sz="1400" b="0" i="0">
                 <a:solidFill>
-                  <a:srgbClr val="666666"/>
+                  <a:srgbClr val="26231F"/>
                 </a:solidFill>
               </a:rPr>
               <a:t>아기 이름 · 부모 이름</a:t>
@@ -6348,34 +6794,34 @@
         <a:sysClr val="window" lastClr="FFFFFF"/>
       </a:lt1>
       <a:dk2>
-        <a:srgbClr val="721D2B"/>
+        <a:srgbClr val="49272D"/>
       </a:dk2>
       <a:lt2>
-        <a:srgbClr val="FCF3F4"/>
+        <a:srgbClr val="FDEAED"/>
       </a:lt2>
       <a:accent1>
-        <a:srgbClr val="DF3A55"/>
+        <a:srgbClr val="ED97A5"/>
       </a:accent1>
       <a:accent2>
-        <a:srgbClr val="339941"/>
+        <a:srgbClr val="F3CBBA"/>
       </a:accent2>
       <a:accent3>
-        <a:srgbClr val="721D2B"/>
+        <a:srgbClr val="49272D"/>
       </a:accent3>
       <a:accent4>
-        <a:srgbClr val="F7D4DA"/>
+        <a:srgbClr val="FAD1D8"/>
       </a:accent4>
       <a:accent5>
-        <a:srgbClr val="896A4B"/>
+        <a:srgbClr val="F0B1B0"/>
       </a:accent5>
       <a:accent6>
-        <a:srgbClr val="AA7780"/>
+        <a:srgbClr val="927D81"/>
       </a:accent6>
       <a:hlink>
-        <a:srgbClr val="DF3A55"/>
+        <a:srgbClr val="ED97A5"/>
       </a:hlink>
       <a:folHlink>
-        <a:srgbClr val="721D2B"/>
+        <a:srgbClr val="49272D"/>
       </a:folHlink>
     </a:clrScheme>
     <a:fontScheme name="Office">
